--- a/fichiers/presentation/PresGlobal.pptx
+++ b/fichiers/presentation/PresGlobal.pptx
@@ -4,9 +4,9 @@
   <p:sldMasterIdLst>
     <p:sldMasterId id="2147483648" r:id="rId1"/>
   </p:sldMasterIdLst>
-  <p:sldIdLst>
-    <p:sldId id="256" r:id="rId2"/>
-  </p:sldIdLst>
+  <p:notesMasterIdLst>
+    <p:notesMasterId r:id="rId2"/>
+  </p:notesMasterIdLst>
   <p:sldSz cx="12192000" cy="6858000"/>
   <p:notesSz cx="6858000" cy="9144000"/>
   <p:defaultTextStyle>
@@ -104,7 +104,383 @@
       </a:defRPr>
     </a:lvl9pPr>
   </p:defaultTextStyle>
+  <p:extLst>
+    <p:ext uri="{521415D9-36F7-43E2-AB2F-B90AF26B5E84}">
+      <p14:sectionLst xmlns:p14="http://schemas.microsoft.com/office/powerpoint/2010/main">
+        <p14:section name="Introduction" id="{74BC9097-585B-485D-BC93-0177D576A349}">
+          <p14:sldIdLst/>
+        </p14:section>
+        <p14:section name="Sommaire" id="{D02495CD-48A6-40B1-A35C-76DF5395AF5B}">
+          <p14:sldIdLst/>
+        </p14:section>
+        <p14:section name="BTS CIEL" id="{78D1BA11-83C6-4016-B96D-76C97B425BD7}">
+          <p14:sldIdLst/>
+        </p14:section>
+        <p14:section name="Terminale SI" id="{13ED0719-2399-4B12-B8F8-A3BF216056C7}">
+          <p14:sldIdLst/>
+        </p14:section>
+        <p14:section name="Terminale STI2D" id="{A1FD940E-7CC3-4994-84FF-F5481451CF84}">
+          <p14:sldIdLst/>
+        </p14:section>
+        <p14:section name="PT/PTSI" id="{523287D0-82AF-4373-81BD-973A9A71F0CE}">
+          <p14:sldIdLst/>
+        </p14:section>
+      </p14:sectionLst>
+    </p:ext>
+    <p:ext uri="{EFAFB233-063F-42B5-8137-9DF3F51BA10A}">
+      <p15:sldGuideLst xmlns:p15="http://schemas.microsoft.com/office/powerpoint/2012/main"/>
+    </p:ext>
+  </p:extLst>
 </p:presentation>
+</file>
+
+<file path=ppt/notesMasters/notesMaster1.xml><?xml version="1.0" encoding="utf-8"?>
+<p:notesMaster xmlns:a="http://schemas.openxmlformats.org/drawingml/2006/main" xmlns:r="http://schemas.openxmlformats.org/officeDocument/2006/relationships" xmlns:p="http://schemas.openxmlformats.org/presentationml/2006/main">
+  <p:cSld>
+    <p:bg>
+      <p:bgRef idx="1001">
+        <a:schemeClr val="bg1"/>
+      </p:bgRef>
+    </p:bg>
+    <p:spTree>
+      <p:nvGrpSpPr>
+        <p:cNvPr id="1" name=""/>
+        <p:cNvGrpSpPr/>
+        <p:nvPr/>
+      </p:nvGrpSpPr>
+      <p:grpSpPr>
+        <a:xfrm>
+          <a:off x="0" y="0"/>
+          <a:ext cx="0" cy="0"/>
+          <a:chOff x="0" y="0"/>
+          <a:chExt cx="0" cy="0"/>
+        </a:xfrm>
+      </p:grpSpPr>
+      <p:sp>
+        <p:nvSpPr>
+          <p:cNvPr id="2" name="Espace réservé de l'en-tête 1"/>
+          <p:cNvSpPr>
+            <a:spLocks noGrp="1"/>
+          </p:cNvSpPr>
+          <p:nvPr>
+            <p:ph type="hdr" sz="quarter"/>
+          </p:nvPr>
+        </p:nvSpPr>
+        <p:spPr>
+          <a:xfrm>
+            <a:off x="0" y="0"/>
+            <a:ext cx="2971800" cy="458788"/>
+          </a:xfrm>
+          <a:prstGeom prst="rect">
+            <a:avLst/>
+          </a:prstGeom>
+        </p:spPr>
+        <p:txBody>
+          <a:bodyPr vert="horz" lIns="91440" tIns="45720" rIns="91440" bIns="45720" rtlCol="0"/>
+          <a:lstStyle>
+            <a:lvl1pPr algn="l">
+              <a:defRPr sz="1200"/>
+            </a:lvl1pPr>
+          </a:lstStyle>
+          <a:p>
+            <a:endParaRPr lang="fr-FR"/>
+          </a:p>
+        </p:txBody>
+      </p:sp>
+      <p:sp>
+        <p:nvSpPr>
+          <p:cNvPr id="3" name="Espace réservé de la date 2"/>
+          <p:cNvSpPr>
+            <a:spLocks noGrp="1"/>
+          </p:cNvSpPr>
+          <p:nvPr>
+            <p:ph type="dt" idx="1"/>
+          </p:nvPr>
+        </p:nvSpPr>
+        <p:spPr>
+          <a:xfrm>
+            <a:off x="3884613" y="0"/>
+            <a:ext cx="2971800" cy="458788"/>
+          </a:xfrm>
+          <a:prstGeom prst="rect">
+            <a:avLst/>
+          </a:prstGeom>
+        </p:spPr>
+        <p:txBody>
+          <a:bodyPr vert="horz" lIns="91440" tIns="45720" rIns="91440" bIns="45720" rtlCol="0"/>
+          <a:lstStyle>
+            <a:lvl1pPr algn="r">
+              <a:defRPr sz="1200"/>
+            </a:lvl1pPr>
+          </a:lstStyle>
+          <a:p>
+            <a:fld id="{1438A7C7-51D5-4CE9-848C-73CCDCB5AD2A}" type="datetimeFigureOut">
+              <a:rPr lang="fr-FR" smtClean="0"/>
+              <a:t>05/06/2026</a:t>
+            </a:fld>
+            <a:endParaRPr lang="fr-FR"/>
+          </a:p>
+        </p:txBody>
+      </p:sp>
+      <p:sp>
+        <p:nvSpPr>
+          <p:cNvPr id="4" name="Espace réservé de l'image des diapositives 3"/>
+          <p:cNvSpPr>
+            <a:spLocks noGrp="1" noRot="1" noChangeAspect="1"/>
+          </p:cNvSpPr>
+          <p:nvPr>
+            <p:ph type="sldImg" idx="2"/>
+          </p:nvPr>
+        </p:nvSpPr>
+        <p:spPr>
+          <a:xfrm>
+            <a:off x="685800" y="1143000"/>
+            <a:ext cx="5486400" cy="3086100"/>
+          </a:xfrm>
+          <a:prstGeom prst="rect">
+            <a:avLst/>
+          </a:prstGeom>
+          <a:noFill/>
+          <a:ln w="12700">
+            <a:solidFill>
+              <a:prstClr val="black"/>
+            </a:solidFill>
+          </a:ln>
+        </p:spPr>
+        <p:txBody>
+          <a:bodyPr vert="horz" lIns="91440" tIns="45720" rIns="91440" bIns="45720" rtlCol="0" anchor="ctr"/>
+          <a:lstStyle/>
+          <a:p>
+            <a:endParaRPr lang="fr-FR"/>
+          </a:p>
+        </p:txBody>
+      </p:sp>
+      <p:sp>
+        <p:nvSpPr>
+          <p:cNvPr id="5" name="Espace réservé des notes 4"/>
+          <p:cNvSpPr>
+            <a:spLocks noGrp="1"/>
+          </p:cNvSpPr>
+          <p:nvPr>
+            <p:ph type="body" sz="quarter" idx="3"/>
+          </p:nvPr>
+        </p:nvSpPr>
+        <p:spPr>
+          <a:xfrm>
+            <a:off x="685800" y="4400550"/>
+            <a:ext cx="5486400" cy="3600450"/>
+          </a:xfrm>
+          <a:prstGeom prst="rect">
+            <a:avLst/>
+          </a:prstGeom>
+        </p:spPr>
+        <p:txBody>
+          <a:bodyPr vert="horz" lIns="91440" tIns="45720" rIns="91440" bIns="45720" rtlCol="0"/>
+          <a:lstStyle/>
+          <a:p>
+            <a:pPr lvl="0"/>
+            <a:r>
+              <a:rPr lang="fr-FR"/>
+              <a:t>Cliquez pour modifier les styles du texte du masque</a:t>
+            </a:r>
+          </a:p>
+          <a:p>
+            <a:pPr lvl="1"/>
+            <a:r>
+              <a:rPr lang="fr-FR"/>
+              <a:t>Deuxième niveau</a:t>
+            </a:r>
+          </a:p>
+          <a:p>
+            <a:pPr lvl="2"/>
+            <a:r>
+              <a:rPr lang="fr-FR"/>
+              <a:t>Troisième niveau</a:t>
+            </a:r>
+          </a:p>
+          <a:p>
+            <a:pPr lvl="3"/>
+            <a:r>
+              <a:rPr lang="fr-FR"/>
+              <a:t>Quatrième niveau</a:t>
+            </a:r>
+          </a:p>
+          <a:p>
+            <a:pPr lvl="4"/>
+            <a:r>
+              <a:rPr lang="fr-FR"/>
+              <a:t>Cinquième niveau</a:t>
+            </a:r>
+          </a:p>
+        </p:txBody>
+      </p:sp>
+      <p:sp>
+        <p:nvSpPr>
+          <p:cNvPr id="6" name="Espace réservé du pied de page 5"/>
+          <p:cNvSpPr>
+            <a:spLocks noGrp="1"/>
+          </p:cNvSpPr>
+          <p:nvPr>
+            <p:ph type="ftr" sz="quarter" idx="4"/>
+          </p:nvPr>
+        </p:nvSpPr>
+        <p:spPr>
+          <a:xfrm>
+            <a:off x="0" y="8685213"/>
+            <a:ext cx="2971800" cy="458787"/>
+          </a:xfrm>
+          <a:prstGeom prst="rect">
+            <a:avLst/>
+          </a:prstGeom>
+        </p:spPr>
+        <p:txBody>
+          <a:bodyPr vert="horz" lIns="91440" tIns="45720" rIns="91440" bIns="45720" rtlCol="0" anchor="b"/>
+          <a:lstStyle>
+            <a:lvl1pPr algn="l">
+              <a:defRPr sz="1200"/>
+            </a:lvl1pPr>
+          </a:lstStyle>
+          <a:p>
+            <a:endParaRPr lang="fr-FR"/>
+          </a:p>
+        </p:txBody>
+      </p:sp>
+      <p:sp>
+        <p:nvSpPr>
+          <p:cNvPr id="7" name="Espace réservé du numéro de diapositive 6"/>
+          <p:cNvSpPr>
+            <a:spLocks noGrp="1"/>
+          </p:cNvSpPr>
+          <p:nvPr>
+            <p:ph type="sldNum" sz="quarter" idx="5"/>
+          </p:nvPr>
+        </p:nvSpPr>
+        <p:spPr>
+          <a:xfrm>
+            <a:off x="3884613" y="8685213"/>
+            <a:ext cx="2971800" cy="458787"/>
+          </a:xfrm>
+          <a:prstGeom prst="rect">
+            <a:avLst/>
+          </a:prstGeom>
+        </p:spPr>
+        <p:txBody>
+          <a:bodyPr vert="horz" lIns="91440" tIns="45720" rIns="91440" bIns="45720" rtlCol="0" anchor="b"/>
+          <a:lstStyle>
+            <a:lvl1pPr algn="r">
+              <a:defRPr sz="1200"/>
+            </a:lvl1pPr>
+          </a:lstStyle>
+          <a:p>
+            <a:fld id="{F9B025D0-A47D-4AF2-993F-F9C2E2046C51}" type="slidenum">
+              <a:rPr lang="fr-FR" smtClean="0"/>
+              <a:t>‹N°›</a:t>
+            </a:fld>
+            <a:endParaRPr lang="fr-FR"/>
+          </a:p>
+        </p:txBody>
+      </p:sp>
+    </p:spTree>
+    <p:extLst>
+      <p:ext uri="{BB962C8B-B14F-4D97-AF65-F5344CB8AC3E}">
+        <p14:creationId xmlns:p14="http://schemas.microsoft.com/office/powerpoint/2010/main" val="4153299152"/>
+      </p:ext>
+    </p:extLst>
+  </p:cSld>
+  <p:clrMap bg1="lt1" tx1="dk1" bg2="lt2" tx2="dk2" accent1="accent1" accent2="accent2" accent3="accent3" accent4="accent4" accent5="accent5" accent6="accent6" hlink="hlink" folHlink="folHlink"/>
+  <p:notesStyle>
+    <a:lvl1pPr marL="0" algn="l" defTabSz="914400" rtl="0" eaLnBrk="1" latinLnBrk="0" hangingPunct="1">
+      <a:defRPr sz="1200" kern="1200">
+        <a:solidFill>
+          <a:schemeClr val="tx1"/>
+        </a:solidFill>
+        <a:latin typeface="+mn-lt"/>
+        <a:ea typeface="+mn-ea"/>
+        <a:cs typeface="+mn-cs"/>
+      </a:defRPr>
+    </a:lvl1pPr>
+    <a:lvl2pPr marL="457200" algn="l" defTabSz="914400" rtl="0" eaLnBrk="1" latinLnBrk="0" hangingPunct="1">
+      <a:defRPr sz="1200" kern="1200">
+        <a:solidFill>
+          <a:schemeClr val="tx1"/>
+        </a:solidFill>
+        <a:latin typeface="+mn-lt"/>
+        <a:ea typeface="+mn-ea"/>
+        <a:cs typeface="+mn-cs"/>
+      </a:defRPr>
+    </a:lvl2pPr>
+    <a:lvl3pPr marL="914400" algn="l" defTabSz="914400" rtl="0" eaLnBrk="1" latinLnBrk="0" hangingPunct="1">
+      <a:defRPr sz="1200" kern="1200">
+        <a:solidFill>
+          <a:schemeClr val="tx1"/>
+        </a:solidFill>
+        <a:latin typeface="+mn-lt"/>
+        <a:ea typeface="+mn-ea"/>
+        <a:cs typeface="+mn-cs"/>
+      </a:defRPr>
+    </a:lvl3pPr>
+    <a:lvl4pPr marL="1371600" algn="l" defTabSz="914400" rtl="0" eaLnBrk="1" latinLnBrk="0" hangingPunct="1">
+      <a:defRPr sz="1200" kern="1200">
+        <a:solidFill>
+          <a:schemeClr val="tx1"/>
+        </a:solidFill>
+        <a:latin typeface="+mn-lt"/>
+        <a:ea typeface="+mn-ea"/>
+        <a:cs typeface="+mn-cs"/>
+      </a:defRPr>
+    </a:lvl4pPr>
+    <a:lvl5pPr marL="1828800" algn="l" defTabSz="914400" rtl="0" eaLnBrk="1" latinLnBrk="0" hangingPunct="1">
+      <a:defRPr sz="1200" kern="1200">
+        <a:solidFill>
+          <a:schemeClr val="tx1"/>
+        </a:solidFill>
+        <a:latin typeface="+mn-lt"/>
+        <a:ea typeface="+mn-ea"/>
+        <a:cs typeface="+mn-cs"/>
+      </a:defRPr>
+    </a:lvl5pPr>
+    <a:lvl6pPr marL="2286000" algn="l" defTabSz="914400" rtl="0" eaLnBrk="1" latinLnBrk="0" hangingPunct="1">
+      <a:defRPr sz="1200" kern="1200">
+        <a:solidFill>
+          <a:schemeClr val="tx1"/>
+        </a:solidFill>
+        <a:latin typeface="+mn-lt"/>
+        <a:ea typeface="+mn-ea"/>
+        <a:cs typeface="+mn-cs"/>
+      </a:defRPr>
+    </a:lvl6pPr>
+    <a:lvl7pPr marL="2743200" algn="l" defTabSz="914400" rtl="0" eaLnBrk="1" latinLnBrk="0" hangingPunct="1">
+      <a:defRPr sz="1200" kern="1200">
+        <a:solidFill>
+          <a:schemeClr val="tx1"/>
+        </a:solidFill>
+        <a:latin typeface="+mn-lt"/>
+        <a:ea typeface="+mn-ea"/>
+        <a:cs typeface="+mn-cs"/>
+      </a:defRPr>
+    </a:lvl7pPr>
+    <a:lvl8pPr marL="3200400" algn="l" defTabSz="914400" rtl="0" eaLnBrk="1" latinLnBrk="0" hangingPunct="1">
+      <a:defRPr sz="1200" kern="1200">
+        <a:solidFill>
+          <a:schemeClr val="tx1"/>
+        </a:solidFill>
+        <a:latin typeface="+mn-lt"/>
+        <a:ea typeface="+mn-ea"/>
+        <a:cs typeface="+mn-cs"/>
+      </a:defRPr>
+    </a:lvl8pPr>
+    <a:lvl9pPr marL="3657600" algn="l" defTabSz="914400" rtl="0" eaLnBrk="1" latinLnBrk="0" hangingPunct="1">
+      <a:defRPr sz="1200" kern="1200">
+        <a:solidFill>
+          <a:schemeClr val="tx1"/>
+        </a:solidFill>
+        <a:latin typeface="+mn-lt"/>
+        <a:ea typeface="+mn-ea"/>
+        <a:cs typeface="+mn-cs"/>
+      </a:defRPr>
+    </a:lvl9pPr>
+  </p:notesStyle>
+</p:notesMaster>
 </file>
 
 <file path=ppt/slideLayouts/slideLayout1.xml><?xml version="1.0" encoding="utf-8"?>
@@ -129,7 +505,7 @@
           <p:cNvPr id="2" name="Titre 1">
             <a:extLst>
               <a:ext uri="{FF2B5EF4-FFF2-40B4-BE49-F238E27FC236}">
-                <a16:creationId xmlns:a16="http://schemas.microsoft.com/office/drawing/2014/main" id="{6AB864C5-8409-DFB0-3B9B-94979D36F448}"/>
+                <a16:creationId xmlns:a16="http://schemas.microsoft.com/office/drawing/2014/main" id="{3FCEB990-7A0C-930B-B807-315273F4A1E9}"/>
               </a:ext>
             </a:extLst>
           </p:cNvPr>
@@ -166,7 +542,7 @@
           <p:cNvPr id="3" name="Sous-titre 2">
             <a:extLst>
               <a:ext uri="{FF2B5EF4-FFF2-40B4-BE49-F238E27FC236}">
-                <a16:creationId xmlns:a16="http://schemas.microsoft.com/office/drawing/2014/main" id="{AFAD618E-F897-C0DD-3037-C27C554853BF}"/>
+                <a16:creationId xmlns:a16="http://schemas.microsoft.com/office/drawing/2014/main" id="{F79AE82C-D675-59BE-DB81-D1E162BF6250}"/>
               </a:ext>
             </a:extLst>
           </p:cNvPr>
@@ -236,7 +612,7 @@
           <p:cNvPr id="4" name="Espace réservé de la date 3">
             <a:extLst>
               <a:ext uri="{FF2B5EF4-FFF2-40B4-BE49-F238E27FC236}">
-                <a16:creationId xmlns:a16="http://schemas.microsoft.com/office/drawing/2014/main" id="{84AF0106-CC35-A4DD-5412-7CE48C7A7621}"/>
+                <a16:creationId xmlns:a16="http://schemas.microsoft.com/office/drawing/2014/main" id="{093E9A41-6DBA-833D-09E9-5DAE08586246}"/>
               </a:ext>
             </a:extLst>
           </p:cNvPr>
@@ -252,7 +628,7 @@
           <a:bodyPr/>
           <a:lstStyle/>
           <a:p>
-            <a:fld id="{4B370ED3-0B8D-4E20-8092-85EA022E7F4B}" type="datetimeFigureOut">
+            <a:fld id="{25BF4BE5-493C-4950-8611-4B73EBA124A3}" type="datetime1">
               <a:rPr lang="fr-FR" smtClean="0"/>
               <a:t>05/06/2026</a:t>
             </a:fld>
@@ -265,7 +641,7 @@
           <p:cNvPr id="5" name="Espace réservé du pied de page 4">
             <a:extLst>
               <a:ext uri="{FF2B5EF4-FFF2-40B4-BE49-F238E27FC236}">
-                <a16:creationId xmlns:a16="http://schemas.microsoft.com/office/drawing/2014/main" id="{B9888928-316A-66E7-2F6A-2C91AEBF04C6}"/>
+                <a16:creationId xmlns:a16="http://schemas.microsoft.com/office/drawing/2014/main" id="{8BEE7FB8-4044-9692-0EC3-D64CEB6D93FC}"/>
               </a:ext>
             </a:extLst>
           </p:cNvPr>
@@ -290,7 +666,7 @@
           <p:cNvPr id="6" name="Espace réservé du numéro de diapositive 5">
             <a:extLst>
               <a:ext uri="{FF2B5EF4-FFF2-40B4-BE49-F238E27FC236}">
-                <a16:creationId xmlns:a16="http://schemas.microsoft.com/office/drawing/2014/main" id="{B44B975F-A9D1-25DC-A737-813D9FF9B3D0}"/>
+                <a16:creationId xmlns:a16="http://schemas.microsoft.com/office/drawing/2014/main" id="{0B6FAC5C-4C68-95B9-9E8C-DF0BAB0B3FFC}"/>
               </a:ext>
             </a:extLst>
           </p:cNvPr>
@@ -306,7 +682,7 @@
           <a:bodyPr/>
           <a:lstStyle/>
           <a:p>
-            <a:fld id="{323031C4-9C1E-4D3A-9C35-9DC6162BCEBE}" type="slidenum">
+            <a:fld id="{40743BAD-0FD4-4AFD-913F-F1B3782AF393}" type="slidenum">
               <a:rPr lang="fr-FR" smtClean="0"/>
               <a:t>‹N°›</a:t>
             </a:fld>
@@ -317,7 +693,7 @@
     </p:spTree>
     <p:extLst>
       <p:ext uri="{BB962C8B-B14F-4D97-AF65-F5344CB8AC3E}">
-        <p14:creationId xmlns:p14="http://schemas.microsoft.com/office/powerpoint/2010/main" val="1852989935"/>
+        <p14:creationId xmlns:p14="http://schemas.microsoft.com/office/powerpoint/2010/main" val="3143058345"/>
       </p:ext>
     </p:extLst>
   </p:cSld>
@@ -349,7 +725,7 @@
           <p:cNvPr id="2" name="Titre 1">
             <a:extLst>
               <a:ext uri="{FF2B5EF4-FFF2-40B4-BE49-F238E27FC236}">
-                <a16:creationId xmlns:a16="http://schemas.microsoft.com/office/drawing/2014/main" id="{4D11F6E7-D46C-2102-DE05-C1A03AB43C56}"/>
+                <a16:creationId xmlns:a16="http://schemas.microsoft.com/office/drawing/2014/main" id="{8117F8C8-CFC5-775C-00F2-C32E6A146146}"/>
               </a:ext>
             </a:extLst>
           </p:cNvPr>
@@ -377,7 +753,7 @@
           <p:cNvPr id="3" name="Espace réservé du texte vertical 2">
             <a:extLst>
               <a:ext uri="{FF2B5EF4-FFF2-40B4-BE49-F238E27FC236}">
-                <a16:creationId xmlns:a16="http://schemas.microsoft.com/office/drawing/2014/main" id="{893F45F6-5D69-03DA-1298-2252AB620F5F}"/>
+                <a16:creationId xmlns:a16="http://schemas.microsoft.com/office/drawing/2014/main" id="{8E907C02-5ECB-39E7-C198-753DC8595D36}"/>
               </a:ext>
             </a:extLst>
           </p:cNvPr>
@@ -434,7 +810,7 @@
           <p:cNvPr id="4" name="Espace réservé de la date 3">
             <a:extLst>
               <a:ext uri="{FF2B5EF4-FFF2-40B4-BE49-F238E27FC236}">
-                <a16:creationId xmlns:a16="http://schemas.microsoft.com/office/drawing/2014/main" id="{141FE60E-40DB-A5A7-83F0-3C3712AD2AEB}"/>
+                <a16:creationId xmlns:a16="http://schemas.microsoft.com/office/drawing/2014/main" id="{433D6A81-DFE0-C7DC-F1AB-AE2CA5A96DD2}"/>
               </a:ext>
             </a:extLst>
           </p:cNvPr>
@@ -450,7 +826,7 @@
           <a:bodyPr/>
           <a:lstStyle/>
           <a:p>
-            <a:fld id="{4B370ED3-0B8D-4E20-8092-85EA022E7F4B}" type="datetimeFigureOut">
+            <a:fld id="{7440509C-B4B3-4DBB-BCC9-40D57FCA4C66}" type="datetime1">
               <a:rPr lang="fr-FR" smtClean="0"/>
               <a:t>05/06/2026</a:t>
             </a:fld>
@@ -463,7 +839,7 @@
           <p:cNvPr id="5" name="Espace réservé du pied de page 4">
             <a:extLst>
               <a:ext uri="{FF2B5EF4-FFF2-40B4-BE49-F238E27FC236}">
-                <a16:creationId xmlns:a16="http://schemas.microsoft.com/office/drawing/2014/main" id="{B2F61C74-3E29-9C83-8E45-6C551B5277B8}"/>
+                <a16:creationId xmlns:a16="http://schemas.microsoft.com/office/drawing/2014/main" id="{D3BDA4CE-BAB3-AA97-9BC4-3C60F35C43D8}"/>
               </a:ext>
             </a:extLst>
           </p:cNvPr>
@@ -488,7 +864,7 @@
           <p:cNvPr id="6" name="Espace réservé du numéro de diapositive 5">
             <a:extLst>
               <a:ext uri="{FF2B5EF4-FFF2-40B4-BE49-F238E27FC236}">
-                <a16:creationId xmlns:a16="http://schemas.microsoft.com/office/drawing/2014/main" id="{153E9249-C055-2215-A699-634D365AA4A2}"/>
+                <a16:creationId xmlns:a16="http://schemas.microsoft.com/office/drawing/2014/main" id="{6B63F4A1-F40F-CB14-50C0-48DF248B12C8}"/>
               </a:ext>
             </a:extLst>
           </p:cNvPr>
@@ -504,7 +880,7 @@
           <a:bodyPr/>
           <a:lstStyle/>
           <a:p>
-            <a:fld id="{323031C4-9C1E-4D3A-9C35-9DC6162BCEBE}" type="slidenum">
+            <a:fld id="{40743BAD-0FD4-4AFD-913F-F1B3782AF393}" type="slidenum">
               <a:rPr lang="fr-FR" smtClean="0"/>
               <a:t>‹N°›</a:t>
             </a:fld>
@@ -515,7 +891,7 @@
     </p:spTree>
     <p:extLst>
       <p:ext uri="{BB962C8B-B14F-4D97-AF65-F5344CB8AC3E}">
-        <p14:creationId xmlns:p14="http://schemas.microsoft.com/office/powerpoint/2010/main" val="2244905097"/>
+        <p14:creationId xmlns:p14="http://schemas.microsoft.com/office/powerpoint/2010/main" val="2346551024"/>
       </p:ext>
     </p:extLst>
   </p:cSld>
@@ -547,7 +923,7 @@
           <p:cNvPr id="2" name="Titre vertical 1">
             <a:extLst>
               <a:ext uri="{FF2B5EF4-FFF2-40B4-BE49-F238E27FC236}">
-                <a16:creationId xmlns:a16="http://schemas.microsoft.com/office/drawing/2014/main" id="{705A68A5-0FBC-2899-0C46-B8A40004761A}"/>
+                <a16:creationId xmlns:a16="http://schemas.microsoft.com/office/drawing/2014/main" id="{B8069BF0-3C2A-BB93-3E5B-D70B9032469F}"/>
               </a:ext>
             </a:extLst>
           </p:cNvPr>
@@ -580,7 +956,7 @@
           <p:cNvPr id="3" name="Espace réservé du texte vertical 2">
             <a:extLst>
               <a:ext uri="{FF2B5EF4-FFF2-40B4-BE49-F238E27FC236}">
-                <a16:creationId xmlns:a16="http://schemas.microsoft.com/office/drawing/2014/main" id="{B9645C4A-1C24-6A74-5934-DD45F779A2B1}"/>
+                <a16:creationId xmlns:a16="http://schemas.microsoft.com/office/drawing/2014/main" id="{76F2374B-8422-A183-2EDA-21F26205C633}"/>
               </a:ext>
             </a:extLst>
           </p:cNvPr>
@@ -642,7 +1018,7 @@
           <p:cNvPr id="4" name="Espace réservé de la date 3">
             <a:extLst>
               <a:ext uri="{FF2B5EF4-FFF2-40B4-BE49-F238E27FC236}">
-                <a16:creationId xmlns:a16="http://schemas.microsoft.com/office/drawing/2014/main" id="{74B7CD2F-ADD0-3632-42F1-B79D06614C86}"/>
+                <a16:creationId xmlns:a16="http://schemas.microsoft.com/office/drawing/2014/main" id="{B01ED0EE-2F89-9D20-FD09-954C7FF8F745}"/>
               </a:ext>
             </a:extLst>
           </p:cNvPr>
@@ -658,7 +1034,7 @@
           <a:bodyPr/>
           <a:lstStyle/>
           <a:p>
-            <a:fld id="{4B370ED3-0B8D-4E20-8092-85EA022E7F4B}" type="datetimeFigureOut">
+            <a:fld id="{F751CFBF-E380-4D91-9539-BDFDF7AF5C45}" type="datetime1">
               <a:rPr lang="fr-FR" smtClean="0"/>
               <a:t>05/06/2026</a:t>
             </a:fld>
@@ -671,7 +1047,7 @@
           <p:cNvPr id="5" name="Espace réservé du pied de page 4">
             <a:extLst>
               <a:ext uri="{FF2B5EF4-FFF2-40B4-BE49-F238E27FC236}">
-                <a16:creationId xmlns:a16="http://schemas.microsoft.com/office/drawing/2014/main" id="{BF04DA31-F79A-FF05-3BB8-CBCD7F22AC1A}"/>
+                <a16:creationId xmlns:a16="http://schemas.microsoft.com/office/drawing/2014/main" id="{D117DA64-89EB-04A0-AB0F-7B3BF2303FA5}"/>
               </a:ext>
             </a:extLst>
           </p:cNvPr>
@@ -696,7 +1072,7 @@
           <p:cNvPr id="6" name="Espace réservé du numéro de diapositive 5">
             <a:extLst>
               <a:ext uri="{FF2B5EF4-FFF2-40B4-BE49-F238E27FC236}">
-                <a16:creationId xmlns:a16="http://schemas.microsoft.com/office/drawing/2014/main" id="{BB6AF6EC-86B5-1B26-8C91-CD9A3AB314F3}"/>
+                <a16:creationId xmlns:a16="http://schemas.microsoft.com/office/drawing/2014/main" id="{B7E99105-C1D3-A65D-4851-5E3B49F272C3}"/>
               </a:ext>
             </a:extLst>
           </p:cNvPr>
@@ -712,7 +1088,7 @@
           <a:bodyPr/>
           <a:lstStyle/>
           <a:p>
-            <a:fld id="{323031C4-9C1E-4D3A-9C35-9DC6162BCEBE}" type="slidenum">
+            <a:fld id="{40743BAD-0FD4-4AFD-913F-F1B3782AF393}" type="slidenum">
               <a:rPr lang="fr-FR" smtClean="0"/>
               <a:t>‹N°›</a:t>
             </a:fld>
@@ -723,7 +1099,7 @@
     </p:spTree>
     <p:extLst>
       <p:ext uri="{BB962C8B-B14F-4D97-AF65-F5344CB8AC3E}">
-        <p14:creationId xmlns:p14="http://schemas.microsoft.com/office/powerpoint/2010/main" val="3606289438"/>
+        <p14:creationId xmlns:p14="http://schemas.microsoft.com/office/powerpoint/2010/main" val="1708183880"/>
       </p:ext>
     </p:extLst>
   </p:cSld>
@@ -755,7 +1131,7 @@
           <p:cNvPr id="2" name="Titre 1">
             <a:extLst>
               <a:ext uri="{FF2B5EF4-FFF2-40B4-BE49-F238E27FC236}">
-                <a16:creationId xmlns:a16="http://schemas.microsoft.com/office/drawing/2014/main" id="{A03547AE-47FA-0E54-87A4-3AB568F08808}"/>
+                <a16:creationId xmlns:a16="http://schemas.microsoft.com/office/drawing/2014/main" id="{AB1D23FA-06D4-F49D-0CE6-57353C624C55}"/>
               </a:ext>
             </a:extLst>
           </p:cNvPr>
@@ -783,7 +1159,7 @@
           <p:cNvPr id="3" name="Espace réservé du contenu 2">
             <a:extLst>
               <a:ext uri="{FF2B5EF4-FFF2-40B4-BE49-F238E27FC236}">
-                <a16:creationId xmlns:a16="http://schemas.microsoft.com/office/drawing/2014/main" id="{883F51AA-8948-F699-DE7D-4F694206197E}"/>
+                <a16:creationId xmlns:a16="http://schemas.microsoft.com/office/drawing/2014/main" id="{4BC98462-ACF1-8B7E-09A5-25A1904553A0}"/>
               </a:ext>
             </a:extLst>
           </p:cNvPr>
@@ -840,7 +1216,7 @@
           <p:cNvPr id="4" name="Espace réservé de la date 3">
             <a:extLst>
               <a:ext uri="{FF2B5EF4-FFF2-40B4-BE49-F238E27FC236}">
-                <a16:creationId xmlns:a16="http://schemas.microsoft.com/office/drawing/2014/main" id="{C80CECE2-C357-E43E-1C24-3C23E21D03C3}"/>
+                <a16:creationId xmlns:a16="http://schemas.microsoft.com/office/drawing/2014/main" id="{1CEA1948-0A23-766A-6F46-7C5B28DB2172}"/>
               </a:ext>
             </a:extLst>
           </p:cNvPr>
@@ -856,7 +1232,7 @@
           <a:bodyPr/>
           <a:lstStyle/>
           <a:p>
-            <a:fld id="{4B370ED3-0B8D-4E20-8092-85EA022E7F4B}" type="datetimeFigureOut">
+            <a:fld id="{D2B74F8F-65AC-4766-A2F7-69AD9EC8EDDE}" type="datetime1">
               <a:rPr lang="fr-FR" smtClean="0"/>
               <a:t>05/06/2026</a:t>
             </a:fld>
@@ -869,7 +1245,7 @@
           <p:cNvPr id="5" name="Espace réservé du pied de page 4">
             <a:extLst>
               <a:ext uri="{FF2B5EF4-FFF2-40B4-BE49-F238E27FC236}">
-                <a16:creationId xmlns:a16="http://schemas.microsoft.com/office/drawing/2014/main" id="{1CC7ADF4-15FE-8518-0E88-C227B2E051EF}"/>
+                <a16:creationId xmlns:a16="http://schemas.microsoft.com/office/drawing/2014/main" id="{DA2EF6AA-4F70-D032-4C66-C028318F8D45}"/>
               </a:ext>
             </a:extLst>
           </p:cNvPr>
@@ -894,7 +1270,7 @@
           <p:cNvPr id="6" name="Espace réservé du numéro de diapositive 5">
             <a:extLst>
               <a:ext uri="{FF2B5EF4-FFF2-40B4-BE49-F238E27FC236}">
-                <a16:creationId xmlns:a16="http://schemas.microsoft.com/office/drawing/2014/main" id="{97A8CBCE-DC80-DA3F-8F57-CDE8FAFEF1B6}"/>
+                <a16:creationId xmlns:a16="http://schemas.microsoft.com/office/drawing/2014/main" id="{366E670C-7B3C-F912-8BE7-E5DD1018868B}"/>
               </a:ext>
             </a:extLst>
           </p:cNvPr>
@@ -910,7 +1286,7 @@
           <a:bodyPr/>
           <a:lstStyle/>
           <a:p>
-            <a:fld id="{323031C4-9C1E-4D3A-9C35-9DC6162BCEBE}" type="slidenum">
+            <a:fld id="{40743BAD-0FD4-4AFD-913F-F1B3782AF393}" type="slidenum">
               <a:rPr lang="fr-FR" smtClean="0"/>
               <a:t>‹N°›</a:t>
             </a:fld>
@@ -921,7 +1297,7 @@
     </p:spTree>
     <p:extLst>
       <p:ext uri="{BB962C8B-B14F-4D97-AF65-F5344CB8AC3E}">
-        <p14:creationId xmlns:p14="http://schemas.microsoft.com/office/powerpoint/2010/main" val="4090689340"/>
+        <p14:creationId xmlns:p14="http://schemas.microsoft.com/office/powerpoint/2010/main" val="1428082126"/>
       </p:ext>
     </p:extLst>
   </p:cSld>
@@ -953,7 +1329,7 @@
           <p:cNvPr id="2" name="Titre 1">
             <a:extLst>
               <a:ext uri="{FF2B5EF4-FFF2-40B4-BE49-F238E27FC236}">
-                <a16:creationId xmlns:a16="http://schemas.microsoft.com/office/drawing/2014/main" id="{B3CC0414-43CB-91E2-74D3-66133CF537AF}"/>
+                <a16:creationId xmlns:a16="http://schemas.microsoft.com/office/drawing/2014/main" id="{9EBE8856-93B8-69E6-3D6F-0510D28BC124}"/>
               </a:ext>
             </a:extLst>
           </p:cNvPr>
@@ -990,7 +1366,7 @@
           <p:cNvPr id="3" name="Espace réservé du texte 2">
             <a:extLst>
               <a:ext uri="{FF2B5EF4-FFF2-40B4-BE49-F238E27FC236}">
-                <a16:creationId xmlns:a16="http://schemas.microsoft.com/office/drawing/2014/main" id="{318F3263-21FC-0BE7-EB92-CBC035CE2E2C}"/>
+                <a16:creationId xmlns:a16="http://schemas.microsoft.com/office/drawing/2014/main" id="{696195C6-CABD-9D95-3E22-814035BCBEC4}"/>
               </a:ext>
             </a:extLst>
           </p:cNvPr>
@@ -1115,7 +1491,7 @@
           <p:cNvPr id="4" name="Espace réservé de la date 3">
             <a:extLst>
               <a:ext uri="{FF2B5EF4-FFF2-40B4-BE49-F238E27FC236}">
-                <a16:creationId xmlns:a16="http://schemas.microsoft.com/office/drawing/2014/main" id="{00EE0E5B-D1F0-A5DE-BEEB-EA907484E0A4}"/>
+                <a16:creationId xmlns:a16="http://schemas.microsoft.com/office/drawing/2014/main" id="{2068E9A9-2ADB-BC19-4053-FE71FF9B36D6}"/>
               </a:ext>
             </a:extLst>
           </p:cNvPr>
@@ -1131,7 +1507,7 @@
           <a:bodyPr/>
           <a:lstStyle/>
           <a:p>
-            <a:fld id="{4B370ED3-0B8D-4E20-8092-85EA022E7F4B}" type="datetimeFigureOut">
+            <a:fld id="{B4EF0BDA-B3DF-4C30-B725-2619B0E62ACD}" type="datetime1">
               <a:rPr lang="fr-FR" smtClean="0"/>
               <a:t>05/06/2026</a:t>
             </a:fld>
@@ -1144,7 +1520,7 @@
           <p:cNvPr id="5" name="Espace réservé du pied de page 4">
             <a:extLst>
               <a:ext uri="{FF2B5EF4-FFF2-40B4-BE49-F238E27FC236}">
-                <a16:creationId xmlns:a16="http://schemas.microsoft.com/office/drawing/2014/main" id="{E0959C76-7907-6AE3-4EA7-AAB4C08DEFCD}"/>
+                <a16:creationId xmlns:a16="http://schemas.microsoft.com/office/drawing/2014/main" id="{6CC2D937-7256-1DFB-4883-BEEBFD6CD440}"/>
               </a:ext>
             </a:extLst>
           </p:cNvPr>
@@ -1169,7 +1545,7 @@
           <p:cNvPr id="6" name="Espace réservé du numéro de diapositive 5">
             <a:extLst>
               <a:ext uri="{FF2B5EF4-FFF2-40B4-BE49-F238E27FC236}">
-                <a16:creationId xmlns:a16="http://schemas.microsoft.com/office/drawing/2014/main" id="{733D21EB-EA74-8137-3BE5-0EB1E0849C4B}"/>
+                <a16:creationId xmlns:a16="http://schemas.microsoft.com/office/drawing/2014/main" id="{4DDE3A71-AE75-FC8F-F833-31C1789367D6}"/>
               </a:ext>
             </a:extLst>
           </p:cNvPr>
@@ -1185,7 +1561,7 @@
           <a:bodyPr/>
           <a:lstStyle/>
           <a:p>
-            <a:fld id="{323031C4-9C1E-4D3A-9C35-9DC6162BCEBE}" type="slidenum">
+            <a:fld id="{40743BAD-0FD4-4AFD-913F-F1B3782AF393}" type="slidenum">
               <a:rPr lang="fr-FR" smtClean="0"/>
               <a:t>‹N°›</a:t>
             </a:fld>
@@ -1196,7 +1572,7 @@
     </p:spTree>
     <p:extLst>
       <p:ext uri="{BB962C8B-B14F-4D97-AF65-F5344CB8AC3E}">
-        <p14:creationId xmlns:p14="http://schemas.microsoft.com/office/powerpoint/2010/main" val="3404328816"/>
+        <p14:creationId xmlns:p14="http://schemas.microsoft.com/office/powerpoint/2010/main" val="263366925"/>
       </p:ext>
     </p:extLst>
   </p:cSld>
@@ -1228,7 +1604,7 @@
           <p:cNvPr id="2" name="Titre 1">
             <a:extLst>
               <a:ext uri="{FF2B5EF4-FFF2-40B4-BE49-F238E27FC236}">
-                <a16:creationId xmlns:a16="http://schemas.microsoft.com/office/drawing/2014/main" id="{B9382813-FC43-BB95-6E3D-BD86CB4CE249}"/>
+                <a16:creationId xmlns:a16="http://schemas.microsoft.com/office/drawing/2014/main" id="{FF8C1A00-7E4C-AB6C-FC97-D8B1844788DA}"/>
               </a:ext>
             </a:extLst>
           </p:cNvPr>
@@ -1256,7 +1632,7 @@
           <p:cNvPr id="3" name="Espace réservé du contenu 2">
             <a:extLst>
               <a:ext uri="{FF2B5EF4-FFF2-40B4-BE49-F238E27FC236}">
-                <a16:creationId xmlns:a16="http://schemas.microsoft.com/office/drawing/2014/main" id="{E0D04690-F5B2-D3E4-986E-943A2E6FD0B8}"/>
+                <a16:creationId xmlns:a16="http://schemas.microsoft.com/office/drawing/2014/main" id="{0682C925-B251-50CE-5869-95D24D27CFBE}"/>
               </a:ext>
             </a:extLst>
           </p:cNvPr>
@@ -1318,7 +1694,7 @@
           <p:cNvPr id="4" name="Espace réservé du contenu 3">
             <a:extLst>
               <a:ext uri="{FF2B5EF4-FFF2-40B4-BE49-F238E27FC236}">
-                <a16:creationId xmlns:a16="http://schemas.microsoft.com/office/drawing/2014/main" id="{F928316C-3271-533A-4FBE-98F1E0CD5445}"/>
+                <a16:creationId xmlns:a16="http://schemas.microsoft.com/office/drawing/2014/main" id="{26408117-6E2C-0305-5C00-611A01FAA3D7}"/>
               </a:ext>
             </a:extLst>
           </p:cNvPr>
@@ -1380,7 +1756,7 @@
           <p:cNvPr id="5" name="Espace réservé de la date 4">
             <a:extLst>
               <a:ext uri="{FF2B5EF4-FFF2-40B4-BE49-F238E27FC236}">
-                <a16:creationId xmlns:a16="http://schemas.microsoft.com/office/drawing/2014/main" id="{30341711-8C63-3728-3EC8-A62C1D051403}"/>
+                <a16:creationId xmlns:a16="http://schemas.microsoft.com/office/drawing/2014/main" id="{64907583-A63E-86A1-9A0B-6028C1510121}"/>
               </a:ext>
             </a:extLst>
           </p:cNvPr>
@@ -1396,7 +1772,7 @@
           <a:bodyPr/>
           <a:lstStyle/>
           <a:p>
-            <a:fld id="{4B370ED3-0B8D-4E20-8092-85EA022E7F4B}" type="datetimeFigureOut">
+            <a:fld id="{2BB7BCF4-2F57-44BE-86E1-4D2E12B5FC6A}" type="datetime1">
               <a:rPr lang="fr-FR" smtClean="0"/>
               <a:t>05/06/2026</a:t>
             </a:fld>
@@ -1409,7 +1785,7 @@
           <p:cNvPr id="6" name="Espace réservé du pied de page 5">
             <a:extLst>
               <a:ext uri="{FF2B5EF4-FFF2-40B4-BE49-F238E27FC236}">
-                <a16:creationId xmlns:a16="http://schemas.microsoft.com/office/drawing/2014/main" id="{3643815A-67AF-B6EE-109A-4EE5320184E6}"/>
+                <a16:creationId xmlns:a16="http://schemas.microsoft.com/office/drawing/2014/main" id="{A0059B69-5E95-0004-45E1-4602A1B49209}"/>
               </a:ext>
             </a:extLst>
           </p:cNvPr>
@@ -1434,7 +1810,7 @@
           <p:cNvPr id="7" name="Espace réservé du numéro de diapositive 6">
             <a:extLst>
               <a:ext uri="{FF2B5EF4-FFF2-40B4-BE49-F238E27FC236}">
-                <a16:creationId xmlns:a16="http://schemas.microsoft.com/office/drawing/2014/main" id="{DB4CF605-159E-044A-DDE1-81F4C361517B}"/>
+                <a16:creationId xmlns:a16="http://schemas.microsoft.com/office/drawing/2014/main" id="{94DE6EAF-BE3F-9CF7-3429-CD97C12A5B08}"/>
               </a:ext>
             </a:extLst>
           </p:cNvPr>
@@ -1450,7 +1826,7 @@
           <a:bodyPr/>
           <a:lstStyle/>
           <a:p>
-            <a:fld id="{323031C4-9C1E-4D3A-9C35-9DC6162BCEBE}" type="slidenum">
+            <a:fld id="{40743BAD-0FD4-4AFD-913F-F1B3782AF393}" type="slidenum">
               <a:rPr lang="fr-FR" smtClean="0"/>
               <a:t>‹N°›</a:t>
             </a:fld>
@@ -1461,7 +1837,7 @@
     </p:spTree>
     <p:extLst>
       <p:ext uri="{BB962C8B-B14F-4D97-AF65-F5344CB8AC3E}">
-        <p14:creationId xmlns:p14="http://schemas.microsoft.com/office/powerpoint/2010/main" val="1741656853"/>
+        <p14:creationId xmlns:p14="http://schemas.microsoft.com/office/powerpoint/2010/main" val="3141181750"/>
       </p:ext>
     </p:extLst>
   </p:cSld>
@@ -1493,7 +1869,7 @@
           <p:cNvPr id="2" name="Titre 1">
             <a:extLst>
               <a:ext uri="{FF2B5EF4-FFF2-40B4-BE49-F238E27FC236}">
-                <a16:creationId xmlns:a16="http://schemas.microsoft.com/office/drawing/2014/main" id="{3532BC85-F742-E5F1-66C3-EB90098DFEB3}"/>
+                <a16:creationId xmlns:a16="http://schemas.microsoft.com/office/drawing/2014/main" id="{78DC2200-6D5A-EB3A-6F10-1B9CDBF03A1D}"/>
               </a:ext>
             </a:extLst>
           </p:cNvPr>
@@ -1526,7 +1902,7 @@
           <p:cNvPr id="3" name="Espace réservé du texte 2">
             <a:extLst>
               <a:ext uri="{FF2B5EF4-FFF2-40B4-BE49-F238E27FC236}">
-                <a16:creationId xmlns:a16="http://schemas.microsoft.com/office/drawing/2014/main" id="{CF729FB5-315F-FA57-3EFD-27277EAB6C4C}"/>
+                <a16:creationId xmlns:a16="http://schemas.microsoft.com/office/drawing/2014/main" id="{FA983305-C123-540D-D4BF-256457376118}"/>
               </a:ext>
             </a:extLst>
           </p:cNvPr>
@@ -1597,7 +1973,7 @@
           <p:cNvPr id="4" name="Espace réservé du contenu 3">
             <a:extLst>
               <a:ext uri="{FF2B5EF4-FFF2-40B4-BE49-F238E27FC236}">
-                <a16:creationId xmlns:a16="http://schemas.microsoft.com/office/drawing/2014/main" id="{CDC80822-D215-2A2D-B313-6E2559552896}"/>
+                <a16:creationId xmlns:a16="http://schemas.microsoft.com/office/drawing/2014/main" id="{8F3E8E6E-0F09-18AA-5DE8-94165A80AC74}"/>
               </a:ext>
             </a:extLst>
           </p:cNvPr>
@@ -1659,7 +2035,7 @@
           <p:cNvPr id="5" name="Espace réservé du texte 4">
             <a:extLst>
               <a:ext uri="{FF2B5EF4-FFF2-40B4-BE49-F238E27FC236}">
-                <a16:creationId xmlns:a16="http://schemas.microsoft.com/office/drawing/2014/main" id="{C3C535CC-4003-4AEA-9A2A-5B5A87AF2A1B}"/>
+                <a16:creationId xmlns:a16="http://schemas.microsoft.com/office/drawing/2014/main" id="{DA0A1188-E098-DA6D-C0CE-417FC071309D}"/>
               </a:ext>
             </a:extLst>
           </p:cNvPr>
@@ -1730,7 +2106,7 @@
           <p:cNvPr id="6" name="Espace réservé du contenu 5">
             <a:extLst>
               <a:ext uri="{FF2B5EF4-FFF2-40B4-BE49-F238E27FC236}">
-                <a16:creationId xmlns:a16="http://schemas.microsoft.com/office/drawing/2014/main" id="{7F3E41BC-FB21-2500-F09E-1FEE254A804E}"/>
+                <a16:creationId xmlns:a16="http://schemas.microsoft.com/office/drawing/2014/main" id="{3A429935-247C-CB9B-1194-CCF13DE2A8C5}"/>
               </a:ext>
             </a:extLst>
           </p:cNvPr>
@@ -1792,7 +2168,7 @@
           <p:cNvPr id="7" name="Espace réservé de la date 6">
             <a:extLst>
               <a:ext uri="{FF2B5EF4-FFF2-40B4-BE49-F238E27FC236}">
-                <a16:creationId xmlns:a16="http://schemas.microsoft.com/office/drawing/2014/main" id="{B94C1020-2D8F-8BB8-CBF1-30EA9ABFDB3D}"/>
+                <a16:creationId xmlns:a16="http://schemas.microsoft.com/office/drawing/2014/main" id="{864591C0-9D84-81F3-D694-9D9CED871779}"/>
               </a:ext>
             </a:extLst>
           </p:cNvPr>
@@ -1808,7 +2184,7 @@
           <a:bodyPr/>
           <a:lstStyle/>
           <a:p>
-            <a:fld id="{4B370ED3-0B8D-4E20-8092-85EA022E7F4B}" type="datetimeFigureOut">
+            <a:fld id="{6321D020-EA2F-4E08-9F19-25238FB1646F}" type="datetime1">
               <a:rPr lang="fr-FR" smtClean="0"/>
               <a:t>05/06/2026</a:t>
             </a:fld>
@@ -1821,7 +2197,7 @@
           <p:cNvPr id="8" name="Espace réservé du pied de page 7">
             <a:extLst>
               <a:ext uri="{FF2B5EF4-FFF2-40B4-BE49-F238E27FC236}">
-                <a16:creationId xmlns:a16="http://schemas.microsoft.com/office/drawing/2014/main" id="{44EFB479-4B1B-4006-3BA2-EA16ECEE261E}"/>
+                <a16:creationId xmlns:a16="http://schemas.microsoft.com/office/drawing/2014/main" id="{EA21687A-41C2-A4ED-4E39-A533CB0AC700}"/>
               </a:ext>
             </a:extLst>
           </p:cNvPr>
@@ -1846,7 +2222,7 @@
           <p:cNvPr id="9" name="Espace réservé du numéro de diapositive 8">
             <a:extLst>
               <a:ext uri="{FF2B5EF4-FFF2-40B4-BE49-F238E27FC236}">
-                <a16:creationId xmlns:a16="http://schemas.microsoft.com/office/drawing/2014/main" id="{67684353-C2B7-1DF6-D202-AE0EE578064A}"/>
+                <a16:creationId xmlns:a16="http://schemas.microsoft.com/office/drawing/2014/main" id="{3915F62C-820E-AB5C-3A2A-E45242BC6B52}"/>
               </a:ext>
             </a:extLst>
           </p:cNvPr>
@@ -1862,7 +2238,7 @@
           <a:bodyPr/>
           <a:lstStyle/>
           <a:p>
-            <a:fld id="{323031C4-9C1E-4D3A-9C35-9DC6162BCEBE}" type="slidenum">
+            <a:fld id="{40743BAD-0FD4-4AFD-913F-F1B3782AF393}" type="slidenum">
               <a:rPr lang="fr-FR" smtClean="0"/>
               <a:t>‹N°›</a:t>
             </a:fld>
@@ -1873,7 +2249,7 @@
     </p:spTree>
     <p:extLst>
       <p:ext uri="{BB962C8B-B14F-4D97-AF65-F5344CB8AC3E}">
-        <p14:creationId xmlns:p14="http://schemas.microsoft.com/office/powerpoint/2010/main" val="2334590757"/>
+        <p14:creationId xmlns:p14="http://schemas.microsoft.com/office/powerpoint/2010/main" val="1084249366"/>
       </p:ext>
     </p:extLst>
   </p:cSld>
@@ -1905,7 +2281,7 @@
           <p:cNvPr id="2" name="Titre 1">
             <a:extLst>
               <a:ext uri="{FF2B5EF4-FFF2-40B4-BE49-F238E27FC236}">
-                <a16:creationId xmlns:a16="http://schemas.microsoft.com/office/drawing/2014/main" id="{5D5B71FF-79DC-13F7-E433-925C1B4E969B}"/>
+                <a16:creationId xmlns:a16="http://schemas.microsoft.com/office/drawing/2014/main" id="{A354173D-D8F7-ABFF-4E33-5924775DDE49}"/>
               </a:ext>
             </a:extLst>
           </p:cNvPr>
@@ -1933,7 +2309,7 @@
           <p:cNvPr id="3" name="Espace réservé de la date 2">
             <a:extLst>
               <a:ext uri="{FF2B5EF4-FFF2-40B4-BE49-F238E27FC236}">
-                <a16:creationId xmlns:a16="http://schemas.microsoft.com/office/drawing/2014/main" id="{2299ABA7-5B62-36AF-6B24-70DF58057EAF}"/>
+                <a16:creationId xmlns:a16="http://schemas.microsoft.com/office/drawing/2014/main" id="{853A9603-240B-46E8-E4B9-8575D412CB31}"/>
               </a:ext>
             </a:extLst>
           </p:cNvPr>
@@ -1949,7 +2325,7 @@
           <a:bodyPr/>
           <a:lstStyle/>
           <a:p>
-            <a:fld id="{4B370ED3-0B8D-4E20-8092-85EA022E7F4B}" type="datetimeFigureOut">
+            <a:fld id="{13019C80-4ECC-4A86-ACB8-43004AF15481}" type="datetime1">
               <a:rPr lang="fr-FR" smtClean="0"/>
               <a:t>05/06/2026</a:t>
             </a:fld>
@@ -1962,7 +2338,7 @@
           <p:cNvPr id="4" name="Espace réservé du pied de page 3">
             <a:extLst>
               <a:ext uri="{FF2B5EF4-FFF2-40B4-BE49-F238E27FC236}">
-                <a16:creationId xmlns:a16="http://schemas.microsoft.com/office/drawing/2014/main" id="{C0F7F9AF-ADF1-CB23-EBDB-5C7A9CECF91A}"/>
+                <a16:creationId xmlns:a16="http://schemas.microsoft.com/office/drawing/2014/main" id="{6A4C4C47-B417-AA12-60E4-DDF89C115BFC}"/>
               </a:ext>
             </a:extLst>
           </p:cNvPr>
@@ -1987,7 +2363,7 @@
           <p:cNvPr id="5" name="Espace réservé du numéro de diapositive 4">
             <a:extLst>
               <a:ext uri="{FF2B5EF4-FFF2-40B4-BE49-F238E27FC236}">
-                <a16:creationId xmlns:a16="http://schemas.microsoft.com/office/drawing/2014/main" id="{F62876EF-440C-36A8-3F98-DDBF4D94A8DB}"/>
+                <a16:creationId xmlns:a16="http://schemas.microsoft.com/office/drawing/2014/main" id="{21A6CAD8-FE20-3F02-77FD-A4FDEC273C9D}"/>
               </a:ext>
             </a:extLst>
           </p:cNvPr>
@@ -2003,7 +2379,7 @@
           <a:bodyPr/>
           <a:lstStyle/>
           <a:p>
-            <a:fld id="{323031C4-9C1E-4D3A-9C35-9DC6162BCEBE}" type="slidenum">
+            <a:fld id="{40743BAD-0FD4-4AFD-913F-F1B3782AF393}" type="slidenum">
               <a:rPr lang="fr-FR" smtClean="0"/>
               <a:t>‹N°›</a:t>
             </a:fld>
@@ -2014,7 +2390,7 @@
     </p:spTree>
     <p:extLst>
       <p:ext uri="{BB962C8B-B14F-4D97-AF65-F5344CB8AC3E}">
-        <p14:creationId xmlns:p14="http://schemas.microsoft.com/office/powerpoint/2010/main" val="3449971690"/>
+        <p14:creationId xmlns:p14="http://schemas.microsoft.com/office/powerpoint/2010/main" val="906225563"/>
       </p:ext>
     </p:extLst>
   </p:cSld>
@@ -2046,7 +2422,7 @@
           <p:cNvPr id="2" name="Espace réservé de la date 1">
             <a:extLst>
               <a:ext uri="{FF2B5EF4-FFF2-40B4-BE49-F238E27FC236}">
-                <a16:creationId xmlns:a16="http://schemas.microsoft.com/office/drawing/2014/main" id="{890D77A3-CEC5-942E-F42A-BCD2F2E4EBC5}"/>
+                <a16:creationId xmlns:a16="http://schemas.microsoft.com/office/drawing/2014/main" id="{68C89A0A-9486-A395-45EE-814015E1A9A6}"/>
               </a:ext>
             </a:extLst>
           </p:cNvPr>
@@ -2062,7 +2438,7 @@
           <a:bodyPr/>
           <a:lstStyle/>
           <a:p>
-            <a:fld id="{4B370ED3-0B8D-4E20-8092-85EA022E7F4B}" type="datetimeFigureOut">
+            <a:fld id="{D5B1220C-94C3-4D23-98DD-B536DE4A6F2C}" type="datetime1">
               <a:rPr lang="fr-FR" smtClean="0"/>
               <a:t>05/06/2026</a:t>
             </a:fld>
@@ -2075,7 +2451,7 @@
           <p:cNvPr id="3" name="Espace réservé du pied de page 2">
             <a:extLst>
               <a:ext uri="{FF2B5EF4-FFF2-40B4-BE49-F238E27FC236}">
-                <a16:creationId xmlns:a16="http://schemas.microsoft.com/office/drawing/2014/main" id="{99DE1B3F-A829-56C8-D283-3EFD2CCDEB80}"/>
+                <a16:creationId xmlns:a16="http://schemas.microsoft.com/office/drawing/2014/main" id="{FC75FEA0-3A4D-D739-7F9E-15ED6AF68163}"/>
               </a:ext>
             </a:extLst>
           </p:cNvPr>
@@ -2100,7 +2476,7 @@
           <p:cNvPr id="4" name="Espace réservé du numéro de diapositive 3">
             <a:extLst>
               <a:ext uri="{FF2B5EF4-FFF2-40B4-BE49-F238E27FC236}">
-                <a16:creationId xmlns:a16="http://schemas.microsoft.com/office/drawing/2014/main" id="{1C9D5DBD-BE54-177E-32D0-546E25511A96}"/>
+                <a16:creationId xmlns:a16="http://schemas.microsoft.com/office/drawing/2014/main" id="{723D1B0A-A486-BD43-95DB-CCE066747665}"/>
               </a:ext>
             </a:extLst>
           </p:cNvPr>
@@ -2116,7 +2492,7 @@
           <a:bodyPr/>
           <a:lstStyle/>
           <a:p>
-            <a:fld id="{323031C4-9C1E-4D3A-9C35-9DC6162BCEBE}" type="slidenum">
+            <a:fld id="{40743BAD-0FD4-4AFD-913F-F1B3782AF393}" type="slidenum">
               <a:rPr lang="fr-FR" smtClean="0"/>
               <a:t>‹N°›</a:t>
             </a:fld>
@@ -2127,7 +2503,7 @@
     </p:spTree>
     <p:extLst>
       <p:ext uri="{BB962C8B-B14F-4D97-AF65-F5344CB8AC3E}">
-        <p14:creationId xmlns:p14="http://schemas.microsoft.com/office/powerpoint/2010/main" val="2885561089"/>
+        <p14:creationId xmlns:p14="http://schemas.microsoft.com/office/powerpoint/2010/main" val="4036155402"/>
       </p:ext>
     </p:extLst>
   </p:cSld>
@@ -2159,7 +2535,7 @@
           <p:cNvPr id="2" name="Titre 1">
             <a:extLst>
               <a:ext uri="{FF2B5EF4-FFF2-40B4-BE49-F238E27FC236}">
-                <a16:creationId xmlns:a16="http://schemas.microsoft.com/office/drawing/2014/main" id="{E8A69D5D-9463-89B0-E764-23F8F4380F1C}"/>
+                <a16:creationId xmlns:a16="http://schemas.microsoft.com/office/drawing/2014/main" id="{8B4FF095-0866-D82E-F70C-88A7EFC4D16D}"/>
               </a:ext>
             </a:extLst>
           </p:cNvPr>
@@ -2196,7 +2572,7 @@
           <p:cNvPr id="3" name="Espace réservé du contenu 2">
             <a:extLst>
               <a:ext uri="{FF2B5EF4-FFF2-40B4-BE49-F238E27FC236}">
-                <a16:creationId xmlns:a16="http://schemas.microsoft.com/office/drawing/2014/main" id="{7FA043B5-B041-2E77-2297-CF6B5E8E080D}"/>
+                <a16:creationId xmlns:a16="http://schemas.microsoft.com/office/drawing/2014/main" id="{E9217B13-4378-1CDA-9E90-233DBB816DD8}"/>
               </a:ext>
             </a:extLst>
           </p:cNvPr>
@@ -2286,7 +2662,7 @@
           <p:cNvPr id="4" name="Espace réservé du texte 3">
             <a:extLst>
               <a:ext uri="{FF2B5EF4-FFF2-40B4-BE49-F238E27FC236}">
-                <a16:creationId xmlns:a16="http://schemas.microsoft.com/office/drawing/2014/main" id="{B7D8B313-923F-F8D1-EBB0-D9AD0289E49D}"/>
+                <a16:creationId xmlns:a16="http://schemas.microsoft.com/office/drawing/2014/main" id="{41A150B4-B5A5-4C65-D51A-FC67645C55F9}"/>
               </a:ext>
             </a:extLst>
           </p:cNvPr>
@@ -2357,7 +2733,7 @@
           <p:cNvPr id="5" name="Espace réservé de la date 4">
             <a:extLst>
               <a:ext uri="{FF2B5EF4-FFF2-40B4-BE49-F238E27FC236}">
-                <a16:creationId xmlns:a16="http://schemas.microsoft.com/office/drawing/2014/main" id="{5B2E47AF-549D-CA6A-8C39-C4782CC2C4C4}"/>
+                <a16:creationId xmlns:a16="http://schemas.microsoft.com/office/drawing/2014/main" id="{8FA72E2C-893F-8884-938B-EA9323CA4C66}"/>
               </a:ext>
             </a:extLst>
           </p:cNvPr>
@@ -2373,7 +2749,7 @@
           <a:bodyPr/>
           <a:lstStyle/>
           <a:p>
-            <a:fld id="{4B370ED3-0B8D-4E20-8092-85EA022E7F4B}" type="datetimeFigureOut">
+            <a:fld id="{D77193F2-5089-4D6D-B951-141B92746967}" type="datetime1">
               <a:rPr lang="fr-FR" smtClean="0"/>
               <a:t>05/06/2026</a:t>
             </a:fld>
@@ -2386,7 +2762,7 @@
           <p:cNvPr id="6" name="Espace réservé du pied de page 5">
             <a:extLst>
               <a:ext uri="{FF2B5EF4-FFF2-40B4-BE49-F238E27FC236}">
-                <a16:creationId xmlns:a16="http://schemas.microsoft.com/office/drawing/2014/main" id="{607889B6-06BB-9B56-5F59-E7D7FB02E97C}"/>
+                <a16:creationId xmlns:a16="http://schemas.microsoft.com/office/drawing/2014/main" id="{733F9C2A-5565-0757-21ED-333F9CCEA725}"/>
               </a:ext>
             </a:extLst>
           </p:cNvPr>
@@ -2411,7 +2787,7 @@
           <p:cNvPr id="7" name="Espace réservé du numéro de diapositive 6">
             <a:extLst>
               <a:ext uri="{FF2B5EF4-FFF2-40B4-BE49-F238E27FC236}">
-                <a16:creationId xmlns:a16="http://schemas.microsoft.com/office/drawing/2014/main" id="{08992FBA-40FA-3F65-9F61-5707B43C09CC}"/>
+                <a16:creationId xmlns:a16="http://schemas.microsoft.com/office/drawing/2014/main" id="{8C52D00C-BB86-1730-8DB6-231068A7D525}"/>
               </a:ext>
             </a:extLst>
           </p:cNvPr>
@@ -2427,7 +2803,7 @@
           <a:bodyPr/>
           <a:lstStyle/>
           <a:p>
-            <a:fld id="{323031C4-9C1E-4D3A-9C35-9DC6162BCEBE}" type="slidenum">
+            <a:fld id="{40743BAD-0FD4-4AFD-913F-F1B3782AF393}" type="slidenum">
               <a:rPr lang="fr-FR" smtClean="0"/>
               <a:t>‹N°›</a:t>
             </a:fld>
@@ -2438,7 +2814,7 @@
     </p:spTree>
     <p:extLst>
       <p:ext uri="{BB962C8B-B14F-4D97-AF65-F5344CB8AC3E}">
-        <p14:creationId xmlns:p14="http://schemas.microsoft.com/office/powerpoint/2010/main" val="1657752145"/>
+        <p14:creationId xmlns:p14="http://schemas.microsoft.com/office/powerpoint/2010/main" val="2527598879"/>
       </p:ext>
     </p:extLst>
   </p:cSld>
@@ -2470,7 +2846,7 @@
           <p:cNvPr id="2" name="Titre 1">
             <a:extLst>
               <a:ext uri="{FF2B5EF4-FFF2-40B4-BE49-F238E27FC236}">
-                <a16:creationId xmlns:a16="http://schemas.microsoft.com/office/drawing/2014/main" id="{C53FF2A8-6E45-13E5-AC4C-5CDCC3016A18}"/>
+                <a16:creationId xmlns:a16="http://schemas.microsoft.com/office/drawing/2014/main" id="{A35AC9A1-716A-D133-FF1B-F1B6C053D2B1}"/>
               </a:ext>
             </a:extLst>
           </p:cNvPr>
@@ -2507,7 +2883,7 @@
           <p:cNvPr id="3" name="Espace réservé pour une image  2">
             <a:extLst>
               <a:ext uri="{FF2B5EF4-FFF2-40B4-BE49-F238E27FC236}">
-                <a16:creationId xmlns:a16="http://schemas.microsoft.com/office/drawing/2014/main" id="{2CA98790-407B-F7B6-0DEB-4061F5818222}"/>
+                <a16:creationId xmlns:a16="http://schemas.microsoft.com/office/drawing/2014/main" id="{03D9D07D-DC41-677D-C7EC-5ED5585A6325}"/>
               </a:ext>
             </a:extLst>
           </p:cNvPr>
@@ -2574,7 +2950,7 @@
           <p:cNvPr id="4" name="Espace réservé du texte 3">
             <a:extLst>
               <a:ext uri="{FF2B5EF4-FFF2-40B4-BE49-F238E27FC236}">
-                <a16:creationId xmlns:a16="http://schemas.microsoft.com/office/drawing/2014/main" id="{D14642B7-A234-A437-B4CF-006A6F4D6056}"/>
+                <a16:creationId xmlns:a16="http://schemas.microsoft.com/office/drawing/2014/main" id="{71AE6500-07A2-2029-0269-25F7DB3A4276}"/>
               </a:ext>
             </a:extLst>
           </p:cNvPr>
@@ -2645,7 +3021,7 @@
           <p:cNvPr id="5" name="Espace réservé de la date 4">
             <a:extLst>
               <a:ext uri="{FF2B5EF4-FFF2-40B4-BE49-F238E27FC236}">
-                <a16:creationId xmlns:a16="http://schemas.microsoft.com/office/drawing/2014/main" id="{42ECEB3A-D5E3-0EF5-539E-90ED4D46EEE3}"/>
+                <a16:creationId xmlns:a16="http://schemas.microsoft.com/office/drawing/2014/main" id="{20A17D1E-6C2C-8847-93DA-4C6C549B3ADD}"/>
               </a:ext>
             </a:extLst>
           </p:cNvPr>
@@ -2661,7 +3037,7 @@
           <a:bodyPr/>
           <a:lstStyle/>
           <a:p>
-            <a:fld id="{4B370ED3-0B8D-4E20-8092-85EA022E7F4B}" type="datetimeFigureOut">
+            <a:fld id="{2155EEFE-CE4B-45B5-811F-7C771B7BD159}" type="datetime1">
               <a:rPr lang="fr-FR" smtClean="0"/>
               <a:t>05/06/2026</a:t>
             </a:fld>
@@ -2674,7 +3050,7 @@
           <p:cNvPr id="6" name="Espace réservé du pied de page 5">
             <a:extLst>
               <a:ext uri="{FF2B5EF4-FFF2-40B4-BE49-F238E27FC236}">
-                <a16:creationId xmlns:a16="http://schemas.microsoft.com/office/drawing/2014/main" id="{0A4BB191-2D00-E3FB-9065-A6BF756E350F}"/>
+                <a16:creationId xmlns:a16="http://schemas.microsoft.com/office/drawing/2014/main" id="{818DEA7D-85E4-ED3A-AF1B-BD7561F96B8D}"/>
               </a:ext>
             </a:extLst>
           </p:cNvPr>
@@ -2699,7 +3075,7 @@
           <p:cNvPr id="7" name="Espace réservé du numéro de diapositive 6">
             <a:extLst>
               <a:ext uri="{FF2B5EF4-FFF2-40B4-BE49-F238E27FC236}">
-                <a16:creationId xmlns:a16="http://schemas.microsoft.com/office/drawing/2014/main" id="{6CD44045-72AA-28F9-6105-D6A20F822E00}"/>
+                <a16:creationId xmlns:a16="http://schemas.microsoft.com/office/drawing/2014/main" id="{14652352-C267-23DC-ECFD-D2E3B2398599}"/>
               </a:ext>
             </a:extLst>
           </p:cNvPr>
@@ -2715,7 +3091,7 @@
           <a:bodyPr/>
           <a:lstStyle/>
           <a:p>
-            <a:fld id="{323031C4-9C1E-4D3A-9C35-9DC6162BCEBE}" type="slidenum">
+            <a:fld id="{40743BAD-0FD4-4AFD-913F-F1B3782AF393}" type="slidenum">
               <a:rPr lang="fr-FR" smtClean="0"/>
               <a:t>‹N°›</a:t>
             </a:fld>
@@ -2726,7 +3102,7 @@
     </p:spTree>
     <p:extLst>
       <p:ext uri="{BB962C8B-B14F-4D97-AF65-F5344CB8AC3E}">
-        <p14:creationId xmlns:p14="http://schemas.microsoft.com/office/powerpoint/2010/main" val="1003145222"/>
+        <p14:creationId xmlns:p14="http://schemas.microsoft.com/office/powerpoint/2010/main" val="701577253"/>
       </p:ext>
     </p:extLst>
   </p:cSld>
@@ -2763,7 +3139,7 @@
           <p:cNvPr id="2" name="Espace réservé du titre 1">
             <a:extLst>
               <a:ext uri="{FF2B5EF4-FFF2-40B4-BE49-F238E27FC236}">
-                <a16:creationId xmlns:a16="http://schemas.microsoft.com/office/drawing/2014/main" id="{50F27EF7-6B4A-F021-00AE-93E54FE41CFA}"/>
+                <a16:creationId xmlns:a16="http://schemas.microsoft.com/office/drawing/2014/main" id="{6A63F858-957B-E10C-8EA8-2C912F7F9B89}"/>
               </a:ext>
             </a:extLst>
           </p:cNvPr>
@@ -2801,7 +3177,7 @@
           <p:cNvPr id="3" name="Espace réservé du texte 2">
             <a:extLst>
               <a:ext uri="{FF2B5EF4-FFF2-40B4-BE49-F238E27FC236}">
-                <a16:creationId xmlns:a16="http://schemas.microsoft.com/office/drawing/2014/main" id="{AAF63F5D-ED10-F1D6-E446-1BCAE083BB7C}"/>
+                <a16:creationId xmlns:a16="http://schemas.microsoft.com/office/drawing/2014/main" id="{E9D84943-2B3A-08D0-6FA3-2337D20718C6}"/>
               </a:ext>
             </a:extLst>
           </p:cNvPr>
@@ -2868,7 +3244,7 @@
           <p:cNvPr id="4" name="Espace réservé de la date 3">
             <a:extLst>
               <a:ext uri="{FF2B5EF4-FFF2-40B4-BE49-F238E27FC236}">
-                <a16:creationId xmlns:a16="http://schemas.microsoft.com/office/drawing/2014/main" id="{A5994DB2-69CA-8E3F-09B6-BB45002ECCEC}"/>
+                <a16:creationId xmlns:a16="http://schemas.microsoft.com/office/drawing/2014/main" id="{496B7733-A9F3-A94B-D444-885FF39D0CCC}"/>
               </a:ext>
             </a:extLst>
           </p:cNvPr>
@@ -2902,7 +3278,7 @@
             </a:lvl1pPr>
           </a:lstStyle>
           <a:p>
-            <a:fld id="{4B370ED3-0B8D-4E20-8092-85EA022E7F4B}" type="datetimeFigureOut">
+            <a:fld id="{8865F967-DFD5-47C5-B34E-026F86C5401C}" type="datetime1">
               <a:rPr lang="fr-FR" smtClean="0"/>
               <a:t>05/06/2026</a:t>
             </a:fld>
@@ -2915,7 +3291,7 @@
           <p:cNvPr id="5" name="Espace réservé du pied de page 4">
             <a:extLst>
               <a:ext uri="{FF2B5EF4-FFF2-40B4-BE49-F238E27FC236}">
-                <a16:creationId xmlns:a16="http://schemas.microsoft.com/office/drawing/2014/main" id="{87704D5C-068E-01F6-6945-C0E1F4E54DB0}"/>
+                <a16:creationId xmlns:a16="http://schemas.microsoft.com/office/drawing/2014/main" id="{9115736C-1122-4351-D878-1031DAA92AC2}"/>
               </a:ext>
             </a:extLst>
           </p:cNvPr>
@@ -2958,7 +3334,7 @@
           <p:cNvPr id="6" name="Espace réservé du numéro de diapositive 5">
             <a:extLst>
               <a:ext uri="{FF2B5EF4-FFF2-40B4-BE49-F238E27FC236}">
-                <a16:creationId xmlns:a16="http://schemas.microsoft.com/office/drawing/2014/main" id="{0F150D74-F5C2-3665-22F3-3D5FB8C64783}"/>
+                <a16:creationId xmlns:a16="http://schemas.microsoft.com/office/drawing/2014/main" id="{1F985781-7200-37A2-BEAD-E5AAFD99FC79}"/>
               </a:ext>
             </a:extLst>
           </p:cNvPr>
@@ -2971,7 +3347,7 @@
         </p:nvSpPr>
         <p:spPr>
           <a:xfrm>
-            <a:off x="8610600" y="6356350"/>
+            <a:off x="9401908" y="6423270"/>
             <a:ext cx="2743200" cy="365125"/>
           </a:xfrm>
           <a:prstGeom prst="rect">
@@ -2982,7 +3358,7 @@
           <a:bodyPr vert="horz" lIns="91440" tIns="45720" rIns="91440" bIns="45720" rtlCol="0" anchor="ctr"/>
           <a:lstStyle>
             <a:lvl1pPr algn="r">
-              <a:defRPr sz="1200">
+              <a:defRPr sz="2400">
                 <a:solidFill>
                   <a:schemeClr val="tx1">
                     <a:tint val="82000"/>
@@ -2992,18 +3368,19 @@
             </a:lvl1pPr>
           </a:lstStyle>
           <a:p>
-            <a:fld id="{323031C4-9C1E-4D3A-9C35-9DC6162BCEBE}" type="slidenum">
+            <a:fld id="{40743BAD-0FD4-4AFD-913F-F1B3782AF393}" type="slidenum">
               <a:rPr lang="fr-FR" smtClean="0"/>
+              <a:pPr/>
               <a:t>‹N°›</a:t>
             </a:fld>
-            <a:endParaRPr lang="fr-FR"/>
+            <a:endParaRPr lang="fr-FR" dirty="0"/>
           </a:p>
         </p:txBody>
       </p:sp>
     </p:spTree>
     <p:extLst>
       <p:ext uri="{BB962C8B-B14F-4D97-AF65-F5344CB8AC3E}">
-        <p14:creationId xmlns:p14="http://schemas.microsoft.com/office/powerpoint/2010/main" val="2498964959"/>
+        <p14:creationId xmlns:p14="http://schemas.microsoft.com/office/powerpoint/2010/main" val="1550227771"/>
       </p:ext>
     </p:extLst>
   </p:cSld>
@@ -3021,6 +3398,7 @@
     <p:sldLayoutId id="2147483658" r:id="rId10"/>
     <p:sldLayoutId id="2147483659" r:id="rId11"/>
   </p:sldLayoutIdLst>
+  <p:hf hdr="0" ftr="0" dt="0"/>
   <p:txStyles>
     <p:titleStyle>
       <a:lvl1pPr algn="l" defTabSz="914400" rtl="0" eaLnBrk="1" latinLnBrk="0" hangingPunct="1">
@@ -3302,86 +3680,6 @@
     </p:otherStyle>
   </p:txStyles>
 </p:sldMaster>
-</file>
-
-<file path=ppt/slides/slide1.xml><?xml version="1.0" encoding="utf-8"?>
-<p:sld xmlns:a="http://schemas.openxmlformats.org/drawingml/2006/main" xmlns:r="http://schemas.openxmlformats.org/officeDocument/2006/relationships" xmlns:p="http://schemas.openxmlformats.org/presentationml/2006/main">
-  <p:cSld>
-    <p:spTree>
-      <p:nvGrpSpPr>
-        <p:cNvPr id="1" name=""/>
-        <p:cNvGrpSpPr/>
-        <p:nvPr/>
-      </p:nvGrpSpPr>
-      <p:grpSpPr>
-        <a:xfrm>
-          <a:off x="0" y="0"/>
-          <a:ext cx="0" cy="0"/>
-          <a:chOff x="0" y="0"/>
-          <a:chExt cx="0" cy="0"/>
-        </a:xfrm>
-      </p:grpSpPr>
-      <p:sp>
-        <p:nvSpPr>
-          <p:cNvPr id="2" name="Titre 1">
-            <a:extLst>
-              <a:ext uri="{FF2B5EF4-FFF2-40B4-BE49-F238E27FC236}">
-                <a16:creationId xmlns:a16="http://schemas.microsoft.com/office/drawing/2014/main" id="{9D5CC7D2-DD66-059D-12F1-3CCC18B8020D}"/>
-              </a:ext>
-            </a:extLst>
-          </p:cNvPr>
-          <p:cNvSpPr>
-            <a:spLocks noGrp="1"/>
-          </p:cNvSpPr>
-          <p:nvPr>
-            <p:ph type="ctrTitle"/>
-          </p:nvPr>
-        </p:nvSpPr>
-        <p:spPr/>
-        <p:txBody>
-          <a:bodyPr/>
-          <a:lstStyle/>
-          <a:p>
-            <a:endParaRPr lang="fr-FR"/>
-          </a:p>
-        </p:txBody>
-      </p:sp>
-      <p:sp>
-        <p:nvSpPr>
-          <p:cNvPr id="3" name="Sous-titre 2">
-            <a:extLst>
-              <a:ext uri="{FF2B5EF4-FFF2-40B4-BE49-F238E27FC236}">
-                <a16:creationId xmlns:a16="http://schemas.microsoft.com/office/drawing/2014/main" id="{93C599BC-BF58-EE15-0B90-4B118B78C8C4}"/>
-              </a:ext>
-            </a:extLst>
-          </p:cNvPr>
-          <p:cNvSpPr>
-            <a:spLocks noGrp="1"/>
-          </p:cNvSpPr>
-          <p:nvPr>
-            <p:ph type="subTitle" idx="1"/>
-          </p:nvPr>
-        </p:nvSpPr>
-        <p:spPr/>
-        <p:txBody>
-          <a:bodyPr/>
-          <a:lstStyle/>
-          <a:p>
-            <a:endParaRPr lang="fr-FR" dirty="0"/>
-          </a:p>
-        </p:txBody>
-      </p:sp>
-    </p:spTree>
-    <p:extLst>
-      <p:ext uri="{BB962C8B-B14F-4D97-AF65-F5344CB8AC3E}">
-        <p14:creationId xmlns:p14="http://schemas.microsoft.com/office/powerpoint/2010/main" val="3502199264"/>
-      </p:ext>
-    </p:extLst>
-  </p:cSld>
-  <p:clrMapOvr>
-    <a:masterClrMapping/>
-  </p:clrMapOvr>
-</p:sld>
 </file>
 
 <file path=ppt/theme/theme1.xml><?xml version="1.0" encoding="utf-8"?>
@@ -3697,4 +3995,319 @@
     </a:ext>
   </a:extLst>
 </a:theme>
+</file>
+
+<file path=ppt/theme/theme2.xml><?xml version="1.0" encoding="utf-8"?>
+<a:theme xmlns:a="http://schemas.openxmlformats.org/drawingml/2006/main" name="Thème Office">
+  <a:themeElements>
+    <a:clrScheme name="Office">
+      <a:dk1>
+        <a:sysClr val="windowText" lastClr="000000"/>
+      </a:dk1>
+      <a:lt1>
+        <a:sysClr val="window" lastClr="FFFFFF"/>
+      </a:lt1>
+      <a:dk2>
+        <a:srgbClr val="0E2841"/>
+      </a:dk2>
+      <a:lt2>
+        <a:srgbClr val="E8E8E8"/>
+      </a:lt2>
+      <a:accent1>
+        <a:srgbClr val="156082"/>
+      </a:accent1>
+      <a:accent2>
+        <a:srgbClr val="E97132"/>
+      </a:accent2>
+      <a:accent3>
+        <a:srgbClr val="196B24"/>
+      </a:accent3>
+      <a:accent4>
+        <a:srgbClr val="0F9ED5"/>
+      </a:accent4>
+      <a:accent5>
+        <a:srgbClr val="A02B93"/>
+      </a:accent5>
+      <a:accent6>
+        <a:srgbClr val="4EA72E"/>
+      </a:accent6>
+      <a:hlink>
+        <a:srgbClr val="467886"/>
+      </a:hlink>
+      <a:folHlink>
+        <a:srgbClr val="96607D"/>
+      </a:folHlink>
+    </a:clrScheme>
+    <a:fontScheme name="Office">
+      <a:majorFont>
+        <a:latin typeface="Aptos Display" panose="02110004020202020204"/>
+        <a:ea typeface=""/>
+        <a:cs typeface=""/>
+        <a:font script="Jpan" typeface="游ゴシック Light"/>
+        <a:font script="Hang" typeface="맑은 고딕"/>
+        <a:font script="Hans" typeface="等线 Light"/>
+        <a:font script="Hant" typeface="新細明體"/>
+        <a:font script="Arab" typeface="Times New Roman"/>
+        <a:font script="Hebr" typeface="Times New Roman"/>
+        <a:font script="Thai" typeface="Angsana New"/>
+        <a:font script="Ethi" typeface="Nyala"/>
+        <a:font script="Beng" typeface="Vrinda"/>
+        <a:font script="Gujr" typeface="Shruti"/>
+        <a:font script="Khmr" typeface="MoolBoran"/>
+        <a:font script="Knda" typeface="Tunga"/>
+        <a:font script="Guru" typeface="Raavi"/>
+        <a:font script="Cans" typeface="Euphemia"/>
+        <a:font script="Cher" typeface="Plantagenet Cherokee"/>
+        <a:font script="Yiii" typeface="Microsoft Yi Baiti"/>
+        <a:font script="Tibt" typeface="Microsoft Himalaya"/>
+        <a:font script="Thaa" typeface="MV Boli"/>
+        <a:font script="Deva" typeface="Mangal"/>
+        <a:font script="Telu" typeface="Gautami"/>
+        <a:font script="Taml" typeface="Latha"/>
+        <a:font script="Syrc" typeface="Estrangelo Edessa"/>
+        <a:font script="Orya" typeface="Kalinga"/>
+        <a:font script="Mlym" typeface="Kartika"/>
+        <a:font script="Laoo" typeface="DokChampa"/>
+        <a:font script="Sinh" typeface="Iskoola Pota"/>
+        <a:font script="Mong" typeface="Mongolian Baiti"/>
+        <a:font script="Viet" typeface="Times New Roman"/>
+        <a:font script="Uigh" typeface="Microsoft Uighur"/>
+        <a:font script="Geor" typeface="Sylfaen"/>
+        <a:font script="Armn" typeface="Arial"/>
+        <a:font script="Bugi" typeface="Leelawadee UI"/>
+        <a:font script="Bopo" typeface="Microsoft JhengHei"/>
+        <a:font script="Java" typeface="Javanese Text"/>
+        <a:font script="Lisu" typeface="Segoe UI"/>
+        <a:font script="Mymr" typeface="Myanmar Text"/>
+        <a:font script="Nkoo" typeface="Ebrima"/>
+        <a:font script="Olck" typeface="Nirmala UI"/>
+        <a:font script="Osma" typeface="Ebrima"/>
+        <a:font script="Phag" typeface="Phagspa"/>
+        <a:font script="Syrn" typeface="Estrangelo Edessa"/>
+        <a:font script="Syrj" typeface="Estrangelo Edessa"/>
+        <a:font script="Syre" typeface="Estrangelo Edessa"/>
+        <a:font script="Sora" typeface="Nirmala UI"/>
+        <a:font script="Tale" typeface="Microsoft Tai Le"/>
+        <a:font script="Talu" typeface="Microsoft New Tai Lue"/>
+        <a:font script="Tfng" typeface="Ebrima"/>
+      </a:majorFont>
+      <a:minorFont>
+        <a:latin typeface="Aptos" panose="02110004020202020204"/>
+        <a:ea typeface=""/>
+        <a:cs typeface=""/>
+        <a:font script="Jpan" typeface="游ゴシック"/>
+        <a:font script="Hang" typeface="맑은 고딕"/>
+        <a:font script="Hans" typeface="等线"/>
+        <a:font script="Hant" typeface="新細明體"/>
+        <a:font script="Arab" typeface="Arial"/>
+        <a:font script="Hebr" typeface="Arial"/>
+        <a:font script="Thai" typeface="Cordia New"/>
+        <a:font script="Ethi" typeface="Nyala"/>
+        <a:font script="Beng" typeface="Vrinda"/>
+        <a:font script="Gujr" typeface="Shruti"/>
+        <a:font script="Khmr" typeface="DaunPenh"/>
+        <a:font script="Knda" typeface="Tunga"/>
+        <a:font script="Guru" typeface="Raavi"/>
+        <a:font script="Cans" typeface="Euphemia"/>
+        <a:font script="Cher" typeface="Plantagenet Cherokee"/>
+        <a:font script="Yiii" typeface="Microsoft Yi Baiti"/>
+        <a:font script="Tibt" typeface="Microsoft Himalaya"/>
+        <a:font script="Thaa" typeface="MV Boli"/>
+        <a:font script="Deva" typeface="Mangal"/>
+        <a:font script="Telu" typeface="Gautami"/>
+        <a:font script="Taml" typeface="Latha"/>
+        <a:font script="Syrc" typeface="Estrangelo Edessa"/>
+        <a:font script="Orya" typeface="Kalinga"/>
+        <a:font script="Mlym" typeface="Kartika"/>
+        <a:font script="Laoo" typeface="DokChampa"/>
+        <a:font script="Sinh" typeface="Iskoola Pota"/>
+        <a:font script="Mong" typeface="Mongolian Baiti"/>
+        <a:font script="Viet" typeface="Arial"/>
+        <a:font script="Uigh" typeface="Microsoft Uighur"/>
+        <a:font script="Geor" typeface="Sylfaen"/>
+        <a:font script="Armn" typeface="Arial"/>
+        <a:font script="Bugi" typeface="Leelawadee UI"/>
+        <a:font script="Bopo" typeface="Microsoft JhengHei"/>
+        <a:font script="Java" typeface="Javanese Text"/>
+        <a:font script="Lisu" typeface="Segoe UI"/>
+        <a:font script="Mymr" typeface="Myanmar Text"/>
+        <a:font script="Nkoo" typeface="Ebrima"/>
+        <a:font script="Olck" typeface="Nirmala UI"/>
+        <a:font script="Osma" typeface="Ebrima"/>
+        <a:font script="Phag" typeface="Phagspa"/>
+        <a:font script="Syrn" typeface="Estrangelo Edessa"/>
+        <a:font script="Syrj" typeface="Estrangelo Edessa"/>
+        <a:font script="Syre" typeface="Estrangelo Edessa"/>
+        <a:font script="Sora" typeface="Nirmala UI"/>
+        <a:font script="Tale" typeface="Microsoft Tai Le"/>
+        <a:font script="Talu" typeface="Microsoft New Tai Lue"/>
+        <a:font script="Tfng" typeface="Ebrima"/>
+      </a:minorFont>
+    </a:fontScheme>
+    <a:fmtScheme name="Office">
+      <a:fillStyleLst>
+        <a:solidFill>
+          <a:schemeClr val="phClr"/>
+        </a:solidFill>
+        <a:gradFill rotWithShape="1">
+          <a:gsLst>
+            <a:gs pos="0">
+              <a:schemeClr val="phClr">
+                <a:lumMod val="110000"/>
+                <a:satMod val="105000"/>
+                <a:tint val="67000"/>
+              </a:schemeClr>
+            </a:gs>
+            <a:gs pos="50000">
+              <a:schemeClr val="phClr">
+                <a:lumMod val="105000"/>
+                <a:satMod val="103000"/>
+                <a:tint val="73000"/>
+              </a:schemeClr>
+            </a:gs>
+            <a:gs pos="100000">
+              <a:schemeClr val="phClr">
+                <a:lumMod val="105000"/>
+                <a:satMod val="109000"/>
+                <a:tint val="81000"/>
+              </a:schemeClr>
+            </a:gs>
+          </a:gsLst>
+          <a:lin ang="5400000" scaled="0"/>
+        </a:gradFill>
+        <a:gradFill rotWithShape="1">
+          <a:gsLst>
+            <a:gs pos="0">
+              <a:schemeClr val="phClr">
+                <a:satMod val="103000"/>
+                <a:lumMod val="102000"/>
+                <a:tint val="94000"/>
+              </a:schemeClr>
+            </a:gs>
+            <a:gs pos="50000">
+              <a:schemeClr val="phClr">
+                <a:satMod val="110000"/>
+                <a:lumMod val="100000"/>
+                <a:shade val="100000"/>
+              </a:schemeClr>
+            </a:gs>
+            <a:gs pos="100000">
+              <a:schemeClr val="phClr">
+                <a:lumMod val="99000"/>
+                <a:satMod val="120000"/>
+                <a:shade val="78000"/>
+              </a:schemeClr>
+            </a:gs>
+          </a:gsLst>
+          <a:lin ang="5400000" scaled="0"/>
+        </a:gradFill>
+      </a:fillStyleLst>
+      <a:lnStyleLst>
+        <a:ln w="12700" cap="flat" cmpd="sng" algn="ctr">
+          <a:solidFill>
+            <a:schemeClr val="phClr"/>
+          </a:solidFill>
+          <a:prstDash val="solid"/>
+          <a:miter lim="800000"/>
+        </a:ln>
+        <a:ln w="19050" cap="flat" cmpd="sng" algn="ctr">
+          <a:solidFill>
+            <a:schemeClr val="phClr"/>
+          </a:solidFill>
+          <a:prstDash val="solid"/>
+          <a:miter lim="800000"/>
+        </a:ln>
+        <a:ln w="25400" cap="flat" cmpd="sng" algn="ctr">
+          <a:solidFill>
+            <a:schemeClr val="phClr"/>
+          </a:solidFill>
+          <a:prstDash val="solid"/>
+          <a:miter lim="800000"/>
+        </a:ln>
+      </a:lnStyleLst>
+      <a:effectStyleLst>
+        <a:effectStyle>
+          <a:effectLst/>
+        </a:effectStyle>
+        <a:effectStyle>
+          <a:effectLst/>
+        </a:effectStyle>
+        <a:effectStyle>
+          <a:effectLst>
+            <a:outerShdw blurRad="57150" dist="19050" dir="5400000" algn="ctr" rotWithShape="0">
+              <a:srgbClr val="000000">
+                <a:alpha val="63000"/>
+              </a:srgbClr>
+            </a:outerShdw>
+          </a:effectLst>
+        </a:effectStyle>
+      </a:effectStyleLst>
+      <a:bgFillStyleLst>
+        <a:solidFill>
+          <a:schemeClr val="phClr"/>
+        </a:solidFill>
+        <a:solidFill>
+          <a:schemeClr val="phClr">
+            <a:tint val="95000"/>
+            <a:satMod val="170000"/>
+          </a:schemeClr>
+        </a:solidFill>
+        <a:gradFill rotWithShape="1">
+          <a:gsLst>
+            <a:gs pos="0">
+              <a:schemeClr val="phClr">
+                <a:tint val="93000"/>
+                <a:satMod val="150000"/>
+                <a:shade val="98000"/>
+                <a:lumMod val="102000"/>
+              </a:schemeClr>
+            </a:gs>
+            <a:gs pos="50000">
+              <a:schemeClr val="phClr">
+                <a:tint val="98000"/>
+                <a:satMod val="130000"/>
+                <a:shade val="90000"/>
+                <a:lumMod val="103000"/>
+              </a:schemeClr>
+            </a:gs>
+            <a:gs pos="100000">
+              <a:schemeClr val="phClr">
+                <a:shade val="63000"/>
+                <a:satMod val="120000"/>
+              </a:schemeClr>
+            </a:gs>
+          </a:gsLst>
+          <a:lin ang="5400000" scaled="0"/>
+        </a:gradFill>
+      </a:bgFillStyleLst>
+    </a:fmtScheme>
+  </a:themeElements>
+  <a:objectDefaults>
+    <a:lnDef>
+      <a:spPr/>
+      <a:bodyPr/>
+      <a:lstStyle/>
+      <a:style>
+        <a:lnRef idx="2">
+          <a:schemeClr val="accent1"/>
+        </a:lnRef>
+        <a:fillRef idx="0">
+          <a:schemeClr val="accent1"/>
+        </a:fillRef>
+        <a:effectRef idx="1">
+          <a:schemeClr val="accent1"/>
+        </a:effectRef>
+        <a:fontRef idx="minor">
+          <a:schemeClr val="tx1"/>
+        </a:fontRef>
+      </a:style>
+    </a:lnDef>
+  </a:objectDefaults>
+  <a:extraClrSchemeLst/>
+  <a:extLst>
+    <a:ext uri="{05A4C25C-085E-4340-85A3-A5531E510DB2}">
+      <thm15:themeFamily xmlns:thm15="http://schemas.microsoft.com/office/thememl/2012/main" name="Office Theme" id="{2E142A2C-CD16-42D6-873A-C26D2A0506FA}" vid="{1BDDFF52-6CD6-40A5-AB3C-68EB2F1E4D0A}"/>
+    </a:ext>
+  </a:extLst>
+</a:theme>
 </file>
--- a/fichiers/presentation/PresGlobal.pptx
+++ b/fichiers/presentation/PresGlobal.pptx
@@ -9159,7 +9159,7 @@
           <a:p>
             <a:r>
               <a:rPr lang="fr-FR" dirty="0"/>
-              <a:t>HUMBERT Tanguy</a:t>
+              <a:t>NOM Prénom</a:t>
             </a:r>
           </a:p>
           <a:p>

--- a/fichiers/presentation/PresGlobal.pptx
+++ b/fichiers/presentation/PresGlobal.pptx
@@ -1467,13 +1467,8 @@
         <a:p>
           <a:r>
             <a:rPr lang="fr-FR" dirty="0"/>
-            <a:t>2h - </a:t>
+            <a:t>2h - PUILLLE</a:t>
           </a:r>
-          <a:r>
-            <a:rPr lang="fr-FR" dirty="0" err="1"/>
-            <a:t>Salopeir</a:t>
-          </a:r>
-          <a:endParaRPr lang="fr-FR" dirty="0"/>
         </a:p>
       </dgm:t>
     </dgm:pt>
@@ -2759,13 +2754,8 @@
           </a:pPr>
           <a:r>
             <a:rPr lang="fr-FR" sz="1100" kern="1200" dirty="0"/>
-            <a:t>2h - </a:t>
+            <a:t>2h - PUILLLE</a:t>
           </a:r>
-          <a:r>
-            <a:rPr lang="fr-FR" sz="1100" kern="1200" dirty="0" err="1"/>
-            <a:t>Salopeir</a:t>
-          </a:r>
-          <a:endParaRPr lang="fr-FR" sz="1100" kern="1200" dirty="0"/>
         </a:p>
       </dsp:txBody>
       <dsp:txXfrm>
@@ -4929,7 +4919,7 @@
           <a:p>
             <a:fld id="{1438A7C7-51D5-4CE9-848C-73CCDCB5AD2A}" type="datetimeFigureOut">
               <a:rPr lang="fr-FR" smtClean="0"/>
-              <a:t>06/06/2026</a:t>
+              <a:t>08/06/2026</a:t>
             </a:fld>
             <a:endParaRPr lang="fr-FR"/>
           </a:p>
@@ -5365,7 +5355,7 @@
           <a:p>
             <a:fld id="{25BF4BE5-493C-4950-8611-4B73EBA124A3}" type="datetime1">
               <a:rPr lang="fr-FR" smtClean="0"/>
-              <a:t>06/06/2026</a:t>
+              <a:t>08/06/2026</a:t>
             </a:fld>
             <a:endParaRPr lang="fr-FR"/>
           </a:p>
@@ -5719,7 +5709,7 @@
           <a:p>
             <a:fld id="{7440509C-B4B3-4DBB-BCC9-40D57FCA4C66}" type="datetime1">
               <a:rPr lang="fr-FR" smtClean="0"/>
-              <a:t>06/06/2026</a:t>
+              <a:t>08/06/2026</a:t>
             </a:fld>
             <a:endParaRPr lang="fr-FR"/>
           </a:p>
@@ -5899,7 +5889,7 @@
           <a:p>
             <a:fld id="{F751CFBF-E380-4D91-9539-BDFDF7AF5C45}" type="datetime1">
               <a:rPr lang="fr-FR" smtClean="0"/>
-              <a:t>06/06/2026</a:t>
+              <a:t>08/06/2026</a:t>
             </a:fld>
             <a:endParaRPr lang="fr-FR"/>
           </a:p>
@@ -6069,7 +6059,7 @@
           <a:p>
             <a:fld id="{D2B74F8F-65AC-4766-A2F7-69AD9EC8EDDE}" type="datetime1">
               <a:rPr lang="fr-FR" smtClean="0"/>
-              <a:t>06/06/2026</a:t>
+              <a:t>08/06/2026</a:t>
             </a:fld>
             <a:endParaRPr lang="fr-FR"/>
           </a:p>
@@ -6346,7 +6336,7 @@
           <a:p>
             <a:fld id="{B4EF0BDA-B3DF-4C30-B725-2619B0E62ACD}" type="datetime1">
               <a:rPr lang="fr-FR" smtClean="0"/>
-              <a:t>06/06/2026</a:t>
+              <a:t>08/06/2026</a:t>
             </a:fld>
             <a:endParaRPr lang="fr-FR"/>
           </a:p>
@@ -6757,7 +6747,7 @@
           <a:p>
             <a:fld id="{2BB7BCF4-2F57-44BE-86E1-4D2E12B5FC6A}" type="datetime1">
               <a:rPr lang="fr-FR" smtClean="0"/>
-              <a:t>06/06/2026</a:t>
+              <a:t>08/06/2026</a:t>
             </a:fld>
             <a:endParaRPr lang="fr-FR"/>
           </a:p>
@@ -7234,7 +7224,7 @@
           <a:p>
             <a:fld id="{6321D020-EA2F-4E08-9F19-25238FB1646F}" type="datetime1">
               <a:rPr lang="fr-FR" smtClean="0"/>
-              <a:t>06/06/2026</a:t>
+              <a:t>08/06/2026</a:t>
             </a:fld>
             <a:endParaRPr lang="fr-FR"/>
           </a:p>
@@ -7352,7 +7342,7 @@
           <a:p>
             <a:fld id="{13019C80-4ECC-4A86-ACB8-43004AF15481}" type="datetime1">
               <a:rPr lang="fr-FR" smtClean="0"/>
-              <a:t>06/06/2026</a:t>
+              <a:t>08/06/2026</a:t>
             </a:fld>
             <a:endParaRPr lang="fr-FR"/>
           </a:p>
@@ -7447,7 +7437,7 @@
           <a:p>
             <a:fld id="{D5B1220C-94C3-4D23-98DD-B536DE4A6F2C}" type="datetime1">
               <a:rPr lang="fr-FR" smtClean="0"/>
-              <a:t>06/06/2026</a:t>
+              <a:t>08/06/2026</a:t>
             </a:fld>
             <a:endParaRPr lang="fr-FR"/>
           </a:p>
@@ -7793,7 +7783,7 @@
           <a:p>
             <a:fld id="{D77193F2-5089-4D6D-B951-141B92746967}" type="datetime1">
               <a:rPr lang="fr-FR" smtClean="0"/>
-              <a:t>06/06/2026</a:t>
+              <a:t>08/06/2026</a:t>
             </a:fld>
             <a:endParaRPr lang="fr-FR"/>
           </a:p>
@@ -8191,7 +8181,7 @@
           <a:p>
             <a:fld id="{2155EEFE-CE4B-45B5-811F-7C771B7BD159}" type="datetime1">
               <a:rPr lang="fr-FR" smtClean="0"/>
-              <a:t>06/06/2026</a:t>
+              <a:t>08/06/2026</a:t>
             </a:fld>
             <a:endParaRPr lang="fr-FR"/>
           </a:p>
@@ -8479,7 +8469,7 @@
           <a:p>
             <a:fld id="{8865F967-DFD5-47C5-B34E-026F86C5401C}" type="datetime1">
               <a:rPr lang="fr-FR" smtClean="0"/>
-              <a:t>06/06/2026</a:t>
+              <a:t>08/06/2026</a:t>
             </a:fld>
             <a:endParaRPr lang="fr-FR"/>
           </a:p>
@@ -9559,7 +9549,7 @@
             <p:ph idx="1"/>
             <p:extLst>
               <p:ext uri="{D42A27DB-BD31-4B8C-83A1-F6EECF244321}">
-                <p14:modId xmlns:p14="http://schemas.microsoft.com/office/powerpoint/2010/main" val="3236764502"/>
+                <p14:modId xmlns:p14="http://schemas.microsoft.com/office/powerpoint/2010/main" val="2075648815"/>
               </p:ext>
             </p:extLst>
           </p:nvPr>
